--- a/docs/Edu-Sync-Mesh-Hackathon-Pitch.pptx
+++ b/docs/Edu-Sync-Mesh-Hackathon-Pitch.pptx
@@ -17,8 +17,8 @@
   <p:notesMasterIdLst>
     <p:notesMasterId r:id="rId10"/>
   </p:notesMasterIdLst>
-  <p:sldSz cx="9144000" cy="5143500"/>
-  <p:notesSz cx="5143500" cy="9144000"/>
+  <p:sldSz cx="12192000" cy="6858000"/>
+  <p:notesSz cx="6858000" cy="12192000"/>
   <p:defaultTextStyle>
     <a:lvl1pPr marL="0" algn="l" defTabSz="914400" rtl="0" eaLnBrk="1" latinLnBrk="0" hangingPunct="1">
       <a:defRPr sz="1800" kern="1200">
@@ -1506,7 +1506,7 @@
         </p:nvSpPr>
         <p:spPr>
           <a:xfrm rot="2700000">
-            <a:off x="7315200" y="457200"/>
+            <a:off x="9875520" y="457200"/>
             <a:ext cx="2286000" cy="2286000"/>
           </a:xfrm>
           <a:prstGeom prst="rect">
@@ -1528,7 +1528,7 @@
         </p:nvSpPr>
         <p:spPr>
           <a:xfrm rot="1800000">
-            <a:off x="-457200" y="4114800"/>
+            <a:off x="-457200" y="5303520"/>
             <a:ext cx="1828800" cy="1828800"/>
           </a:xfrm>
           <a:prstGeom prst="rect">
@@ -1550,8 +1550,8 @@
         </p:nvSpPr>
         <p:spPr>
           <a:xfrm>
-            <a:off x="457200" y="1645920"/>
-            <a:ext cx="8229600" cy="1097280"/>
+            <a:off x="457200" y="2011680"/>
+            <a:ext cx="11247120" cy="1097280"/>
           </a:xfrm>
           <a:prstGeom prst="rect">
             <a:avLst/>
@@ -1589,8 +1589,8 @@
         </p:nvSpPr>
         <p:spPr>
           <a:xfrm>
-            <a:off x="457200" y="2743200"/>
-            <a:ext cx="8229600" cy="548640"/>
+            <a:off x="457200" y="3108960"/>
+            <a:ext cx="11247120" cy="548640"/>
           </a:xfrm>
           <a:prstGeom prst="rect">
             <a:avLst/>
@@ -1606,17 +1606,14 @@
               <a:buNone/>
             </a:pPr>
             <a:r>
-              <a:rPr lang="en-US" sz="2800" i="1" dirty="0">
+              <a:rPr lang="en-US" sz="2600" i="1" dirty="0">
                 <a:solidFill>
                   <a:srgbClr val="FDD835"/>
                 </a:solidFill>
-                <a:latin typeface="Calibri" pitchFamily="34" charset="0"/>
-                <a:ea typeface="Calibri" pitchFamily="34" charset="-122"/>
-                <a:cs typeface="Calibri" pitchFamily="34" charset="-120"/>
               </a:rPr>
               <a:t>The Offline-First AI Tutor</a:t>
             </a:r>
-            <a:endParaRPr lang="en-US" sz="2800" dirty="0"/>
+            <a:endParaRPr lang="en-US" sz="2600" dirty="0"/>
           </a:p>
         </p:txBody>
       </p:sp>
@@ -1628,8 +1625,8 @@
         </p:nvSpPr>
         <p:spPr>
           <a:xfrm>
-            <a:off x="457200" y="3383280"/>
-            <a:ext cx="8229600" cy="365760"/>
+            <a:off x="457200" y="3703320"/>
+            <a:ext cx="11247120" cy="365760"/>
           </a:xfrm>
           <a:prstGeom prst="rect">
             <a:avLst/>
@@ -1645,17 +1642,14 @@
               <a:buNone/>
             </a:pPr>
             <a:r>
-              <a:rPr lang="en-US" sz="1800" dirty="0">
+              <a:rPr lang="en-US" sz="1600" dirty="0">
                 <a:solidFill>
                   <a:srgbClr val="F5F5F5"/>
                 </a:solidFill>
-                <a:latin typeface="Calibri" pitchFamily="34" charset="0"/>
-                <a:ea typeface="Calibri" pitchFamily="34" charset="-122"/>
-                <a:cs typeface="Calibri" pitchFamily="34" charset="-120"/>
-              </a:rPr>
-              <a:t>Bridging the Rural-Urban Learning Gap in Zimbabwe</a:t>
-            </a:r>
-            <a:endParaRPr lang="en-US" sz="1800" dirty="0"/>
+              </a:rPr>
+              <a:t>Bridging the Rural-Urban Learning Gap in Zimbabwe — with a REAL, working backend</a:t>
+            </a:r>
+            <a:endParaRPr lang="en-US" sz="1600" dirty="0"/>
           </a:p>
         </p:txBody>
       </p:sp>
@@ -1667,8 +1661,8 @@
         </p:nvSpPr>
         <p:spPr>
           <a:xfrm>
-            <a:off x="457200" y="4572000"/>
-            <a:ext cx="8229600" cy="274320"/>
+            <a:off x="457200" y="5943600"/>
+            <a:ext cx="11247120" cy="274320"/>
           </a:xfrm>
           <a:prstGeom prst="rect">
             <a:avLst/>
@@ -1684,17 +1678,50 @@
               <a:buNone/>
             </a:pPr>
             <a:r>
-              <a:rPr lang="en-US" sz="1400" dirty="0">
+              <a:rPr lang="en-US" sz="1300" dirty="0">
                 <a:solidFill>
                   <a:srgbClr val="2E7D32"/>
                 </a:solidFill>
-                <a:latin typeface="Calibri" pitchFamily="34" charset="0"/>
-                <a:ea typeface="Calibri" pitchFamily="34" charset="-122"/>
-                <a:cs typeface="Calibri" pitchFamily="34" charset="-120"/>
-              </a:rPr>
-              <a:t>All University IT Hackathon 2026</a:t>
-            </a:r>
-            <a:endParaRPr lang="en-US" sz="1400" dirty="0"/>
+              </a:rPr>
+              <a:t>All-University IT Hackathon &amp; Innovation Day 2026</a:t>
+            </a:r>
+            <a:endParaRPr lang="en-US" sz="1300" dirty="0"/>
+          </a:p>
+        </p:txBody>
+      </p:sp>
+      <p:sp>
+        <p:nvSpPr>
+          <p:cNvPr id="8" name="Text 6"/>
+          <p:cNvSpPr/>
+          <p:nvPr/>
+        </p:nvSpPr>
+        <p:spPr>
+          <a:xfrm>
+            <a:off x="457200" y="6217920"/>
+            <a:ext cx="11247120" cy="274320"/>
+          </a:xfrm>
+          <a:prstGeom prst="rect">
+            <a:avLst/>
+          </a:prstGeom>
+          <a:noFill/>
+          <a:ln/>
+        </p:spPr>
+        <p:txBody>
+          <a:bodyPr wrap="square" rtlCol="0" anchor="ctr"/>
+          <a:lstStyle/>
+          <a:p>
+            <a:pPr algn="ctr" indent="0" marL="0">
+              <a:buNone/>
+            </a:pPr>
+            <a:r>
+              <a:rPr lang="en-US" sz="1200" dirty="0">
+                <a:solidFill>
+                  <a:srgbClr val="F5F5F5"/>
+                </a:solidFill>
+              </a:rPr>
+              <a:t>Brighton &amp; Kudakwashe Calvin Bhamusi</a:t>
+            </a:r>
+            <a:endParaRPr lang="en-US" sz="1200" dirty="0"/>
           </a:p>
         </p:txBody>
       </p:sp>
@@ -1738,8 +1765,8 @@
         </p:nvSpPr>
         <p:spPr>
           <a:xfrm>
-            <a:off x="457200" y="457200"/>
-            <a:ext cx="8229600" cy="640080"/>
+            <a:off x="457200" y="365760"/>
+            <a:ext cx="11247120" cy="731520"/>
           </a:xfrm>
           <a:prstGeom prst="rect">
             <a:avLst/>
@@ -1755,7 +1782,7 @@
               <a:buNone/>
             </a:pPr>
             <a:r>
-              <a:rPr lang="en-US" sz="4400" b="1" dirty="0">
+              <a:rPr lang="en-US" sz="4000" b="1" dirty="0">
                 <a:solidFill>
                   <a:srgbClr val="B85042"/>
                 </a:solidFill>
@@ -1765,7 +1792,7 @@
               </a:rPr>
               <a:t>THE PAIN: Digital Apartheid</a:t>
             </a:r>
-            <a:endParaRPr lang="en-US" sz="4400" dirty="0"/>
+            <a:endParaRPr lang="en-US" sz="4000" dirty="0"/>
           </a:p>
         </p:txBody>
       </p:sp>
@@ -1777,8 +1804,8 @@
         </p:nvSpPr>
         <p:spPr>
           <a:xfrm>
-            <a:off x="457200" y="1371600"/>
-            <a:ext cx="3931920" cy="3657600"/>
+            <a:off x="457200" y="1463040"/>
+            <a:ext cx="5394960" cy="4389120"/>
           </a:xfrm>
           <a:prstGeom prst="rect">
             <a:avLst/>
@@ -1802,8 +1829,8 @@
         </p:nvSpPr>
         <p:spPr>
           <a:xfrm>
-            <a:off x="640080" y="1554480"/>
-            <a:ext cx="3566160" cy="457200"/>
+            <a:off x="640080" y="1645920"/>
+            <a:ext cx="5029200" cy="457200"/>
           </a:xfrm>
           <a:prstGeom prst="rect">
             <a:avLst/>
@@ -1819,17 +1846,14 @@
               <a:buNone/>
             </a:pPr>
             <a:r>
-              <a:rPr lang="en-US" sz="2000" b="1" dirty="0">
+              <a:rPr lang="en-US" sz="2200" b="1" dirty="0">
                 <a:solidFill>
                   <a:srgbClr val="B85042"/>
                 </a:solidFill>
-                <a:latin typeface="Trebuchet MS" pitchFamily="34" charset="0"/>
-                <a:ea typeface="Trebuchet MS" pitchFamily="34" charset="-122"/>
-                <a:cs typeface="Trebuchet MS" pitchFamily="34" charset="-120"/>
               </a:rPr>
               <a:t>RURAL (Madziva)</a:t>
             </a:r>
-            <a:endParaRPr lang="en-US" sz="2000" dirty="0"/>
+            <a:endParaRPr lang="en-US" sz="2200" dirty="0"/>
           </a:p>
         </p:txBody>
       </p:sp>
@@ -1841,203 +1865,120 @@
         </p:nvSpPr>
         <p:spPr>
           <a:xfrm>
-            <a:off x="731520" y="2194560"/>
-            <a:ext cx="3383280" cy="365760"/>
-          </a:xfrm>
-          <a:prstGeom prst="rect">
-            <a:avLst/>
-          </a:prstGeom>
-          <a:noFill/>
-          <a:ln/>
-        </p:spPr>
-        <p:txBody>
-          <a:bodyPr wrap="square" rtlCol="0" anchor="ctr"/>
-          <a:lstStyle/>
-          <a:p>
-            <a:pPr indent="0" marL="0">
-              <a:buNone/>
-            </a:pPr>
-            <a:r>
-              <a:rPr lang="en-US" sz="1400" dirty="0">
+            <a:off x="731520" y="2286000"/>
+            <a:ext cx="4937760" cy="3383280"/>
+          </a:xfrm>
+          <a:prstGeom prst="rect">
+            <a:avLst/>
+          </a:prstGeom>
+          <a:noFill/>
+          <a:ln/>
+        </p:spPr>
+        <p:txBody>
+          <a:bodyPr wrap="square" rtlCol="0" anchor="ctr"/>
+          <a:lstStyle/>
+          <a:p>
+            <a:pPr marL="342900" indent="-342900">
+              <a:spcAft>
+                <a:spcPts val="1000"/>
+              </a:spcAft>
+              <a:buSzPct val="100000"/>
+              <a:buChar char="•"/>
+            </a:pPr>
+            <a:r>
+              <a:rPr lang="en-US" sz="1600" dirty="0">
                 <a:solidFill>
                   <a:srgbClr val="1B1B1B"/>
                 </a:solidFill>
-                <a:latin typeface="Calibri" pitchFamily="34" charset="0"/>
-                <a:ea typeface="Calibri" pitchFamily="34" charset="-122"/>
-                <a:cs typeface="Calibri" pitchFamily="34" charset="-120"/>
-              </a:rPr>
-              <a:t>📵 No reliable internet</a:t>
-            </a:r>
-            <a:endParaRPr lang="en-US" sz="1400" dirty="0"/>
-          </a:p>
-        </p:txBody>
-      </p:sp>
-      <p:sp>
-        <p:nvSpPr>
-          <p:cNvPr id="6" name="Text 4"/>
-          <p:cNvSpPr/>
-          <p:nvPr/>
-        </p:nvSpPr>
-        <p:spPr>
-          <a:xfrm>
-            <a:off x="731520" y="2651760"/>
-            <a:ext cx="3383280" cy="365760"/>
-          </a:xfrm>
-          <a:prstGeom prst="rect">
-            <a:avLst/>
-          </a:prstGeom>
-          <a:noFill/>
-          <a:ln/>
-        </p:spPr>
-        <p:txBody>
-          <a:bodyPr wrap="square" rtlCol="0" anchor="ctr"/>
-          <a:lstStyle/>
-          <a:p>
-            <a:pPr indent="0" marL="0">
-              <a:buNone/>
-            </a:pPr>
-            <a:r>
-              <a:rPr lang="en-US" sz="1400" dirty="0">
+              </a:rPr>
+              <a:t>No reliable internet</a:t>
+            </a:r>
+            <a:endParaRPr lang="en-US" sz="1600" dirty="0"/>
+          </a:p>
+          <a:p>
+            <a:pPr marL="342900" indent="-342900">
+              <a:spcAft>
+                <a:spcPts val="1000"/>
+              </a:spcAft>
+              <a:buSzPct val="100000"/>
+              <a:buChar char="•"/>
+            </a:pPr>
+            <a:r>
+              <a:rPr lang="en-US" sz="1600" dirty="0">
                 <a:solidFill>
                   <a:srgbClr val="1B1B1B"/>
                 </a:solidFill>
-                <a:latin typeface="Calibri" pitchFamily="34" charset="0"/>
-                <a:ea typeface="Calibri" pitchFamily="34" charset="-122"/>
-                <a:cs typeface="Calibri" pitchFamily="34" charset="-120"/>
-              </a:rPr>
-              <a:t>💰 1GB = 20% weekly income</a:t>
-            </a:r>
-            <a:endParaRPr lang="en-US" sz="1400" dirty="0"/>
-          </a:p>
-        </p:txBody>
-      </p:sp>
-      <p:sp>
-        <p:nvSpPr>
-          <p:cNvPr id="7" name="Text 5"/>
-          <p:cNvSpPr/>
-          <p:nvPr/>
-        </p:nvSpPr>
-        <p:spPr>
-          <a:xfrm>
-            <a:off x="731520" y="3108960"/>
-            <a:ext cx="3383280" cy="365760"/>
-          </a:xfrm>
-          <a:prstGeom prst="rect">
-            <a:avLst/>
-          </a:prstGeom>
-          <a:noFill/>
-          <a:ln/>
-        </p:spPr>
-        <p:txBody>
-          <a:bodyPr wrap="square" rtlCol="0" anchor="ctr"/>
-          <a:lstStyle/>
-          <a:p>
-            <a:pPr indent="0" marL="0">
-              <a:buNone/>
-            </a:pPr>
-            <a:r>
-              <a:rPr lang="en-US" sz="1400" dirty="0">
+              </a:rPr>
+              <a:t>1GB data = 20% of weekly family income</a:t>
+            </a:r>
+            <a:endParaRPr lang="en-US" sz="1600" dirty="0"/>
+          </a:p>
+          <a:p>
+            <a:pPr marL="342900" indent="-342900">
+              <a:spcAft>
+                <a:spcPts val="1000"/>
+              </a:spcAft>
+              <a:buSzPct val="100000"/>
+              <a:buChar char="•"/>
+            </a:pPr>
+            <a:r>
+              <a:rPr lang="en-US" sz="1600" dirty="0">
                 <a:solidFill>
                   <a:srgbClr val="1B1B1B"/>
                 </a:solidFill>
-                <a:latin typeface="Calibri" pitchFamily="34" charset="0"/>
-                <a:ea typeface="Calibri" pitchFamily="34" charset="-122"/>
-                <a:cs typeface="Calibri" pitchFamily="34" charset="-120"/>
-              </a:rPr>
-              <a:t>⚡ Unstable electricity</a:t>
-            </a:r>
-            <a:endParaRPr lang="en-US" sz="1400" dirty="0"/>
-          </a:p>
-        </p:txBody>
-      </p:sp>
-      <p:sp>
-        <p:nvSpPr>
-          <p:cNvPr id="8" name="Text 6"/>
-          <p:cNvSpPr/>
-          <p:nvPr/>
-        </p:nvSpPr>
-        <p:spPr>
-          <a:xfrm>
-            <a:off x="731520" y="3566160"/>
-            <a:ext cx="3383280" cy="365760"/>
-          </a:xfrm>
-          <a:prstGeom prst="rect">
-            <a:avLst/>
-          </a:prstGeom>
-          <a:noFill/>
-          <a:ln/>
-        </p:spPr>
-        <p:txBody>
-          <a:bodyPr wrap="square" rtlCol="0" anchor="ctr"/>
-          <a:lstStyle/>
-          <a:p>
-            <a:pPr indent="0" marL="0">
-              <a:buNone/>
-            </a:pPr>
-            <a:r>
-              <a:rPr lang="en-US" sz="1400" dirty="0">
+              </a:rPr>
+              <a:t>Unstable electricity</a:t>
+            </a:r>
+            <a:endParaRPr lang="en-US" sz="1600" dirty="0"/>
+          </a:p>
+          <a:p>
+            <a:pPr marL="342900" indent="-342900">
+              <a:spcAft>
+                <a:spcPts val="1000"/>
+              </a:spcAft>
+              <a:buSzPct val="100000"/>
+              <a:buChar char="•"/>
+            </a:pPr>
+            <a:r>
+              <a:rPr lang="en-US" sz="1600" dirty="0">
                 <a:solidFill>
                   <a:srgbClr val="1B1B1B"/>
                 </a:solidFill>
-                <a:latin typeface="Calibri" pitchFamily="34" charset="0"/>
-                <a:ea typeface="Calibri" pitchFamily="34" charset="-122"/>
-                <a:cs typeface="Calibri" pitchFamily="34" charset="-120"/>
-              </a:rPr>
-              <a:t>📊 35% ZIMSEC pass rate</a:t>
-            </a:r>
-            <a:endParaRPr lang="en-US" sz="1400" dirty="0"/>
-          </a:p>
-        </p:txBody>
-      </p:sp>
-      <p:sp>
-        <p:nvSpPr>
-          <p:cNvPr id="9" name="Text 7"/>
-          <p:cNvSpPr/>
-          <p:nvPr/>
-        </p:nvSpPr>
-        <p:spPr>
-          <a:xfrm>
-            <a:off x="731520" y="4023360"/>
-            <a:ext cx="3383280" cy="365760"/>
-          </a:xfrm>
-          <a:prstGeom prst="rect">
-            <a:avLst/>
-          </a:prstGeom>
-          <a:noFill/>
-          <a:ln/>
-        </p:spPr>
-        <p:txBody>
-          <a:bodyPr wrap="square" rtlCol="0" anchor="ctr"/>
-          <a:lstStyle/>
-          <a:p>
-            <a:pPr indent="0" marL="0">
-              <a:buNone/>
-            </a:pPr>
-            <a:r>
-              <a:rPr lang="en-US" sz="1400" dirty="0">
+              </a:rPr>
+              <a:t>~35% ZIMSEC pass rate</a:t>
+            </a:r>
+            <a:endParaRPr lang="en-US" sz="1600" dirty="0"/>
+          </a:p>
+          <a:p>
+            <a:pPr marL="342900" indent="-342900">
+              <a:spcAft>
+                <a:spcPts val="1000"/>
+              </a:spcAft>
+              <a:buSzPct val="100000"/>
+              <a:buChar char="•"/>
+            </a:pPr>
+            <a:r>
+              <a:rPr lang="en-US" sz="1600" dirty="0">
                 <a:solidFill>
                   <a:srgbClr val="1B1B1B"/>
                 </a:solidFill>
-                <a:latin typeface="Calibri" pitchFamily="34" charset="0"/>
-                <a:ea typeface="Calibri" pitchFamily="34" charset="-122"/>
-                <a:cs typeface="Calibri" pitchFamily="34" charset="-120"/>
-              </a:rPr>
-              <a:t>🏔️ Students climb hills for 1 bar signal</a:t>
-            </a:r>
-            <a:endParaRPr lang="en-US" sz="1400" dirty="0"/>
-          </a:p>
-        </p:txBody>
-      </p:sp>
-      <p:sp>
-        <p:nvSpPr>
-          <p:cNvPr id="10" name="Shape 8"/>
-          <p:cNvSpPr/>
-          <p:nvPr/>
-        </p:nvSpPr>
-        <p:spPr>
-          <a:xfrm>
-            <a:off x="4754880" y="1371600"/>
-            <a:ext cx="3931920" cy="3657600"/>
+              </a:rPr>
+              <a:t>Students climb hills for 1 bar of signal</a:t>
+            </a:r>
+            <a:endParaRPr lang="en-US" sz="1600" dirty="0"/>
+          </a:p>
+        </p:txBody>
+      </p:sp>
+      <p:sp>
+        <p:nvSpPr>
+          <p:cNvPr id="6" name="Shape 4"/>
+          <p:cNvSpPr/>
+          <p:nvPr/>
+        </p:nvSpPr>
+        <p:spPr>
+          <a:xfrm>
+            <a:off x="6309360" y="1463040"/>
+            <a:ext cx="5394960" cy="4389120"/>
           </a:xfrm>
           <a:prstGeom prst="rect">
             <a:avLst/>
@@ -2055,14 +1996,14 @@
       </p:sp>
       <p:sp>
         <p:nvSpPr>
-          <p:cNvPr id="11" name="Text 9"/>
-          <p:cNvSpPr/>
-          <p:nvPr/>
-        </p:nvSpPr>
-        <p:spPr>
-          <a:xfrm>
-            <a:off x="4937760" y="1554480"/>
-            <a:ext cx="3566160" cy="457200"/>
+          <p:cNvPr id="7" name="Text 5"/>
+          <p:cNvSpPr/>
+          <p:nvPr/>
+        </p:nvSpPr>
+        <p:spPr>
+          <a:xfrm>
+            <a:off x="6492240" y="1645920"/>
+            <a:ext cx="5029200" cy="457200"/>
           </a:xfrm>
           <a:prstGeom prst="rect">
             <a:avLst/>
@@ -2078,212 +2019,126 @@
               <a:buNone/>
             </a:pPr>
             <a:r>
-              <a:rPr lang="en-US" sz="2000" b="1" dirty="0">
+              <a:rPr lang="en-US" sz="2200" b="1" dirty="0">
                 <a:solidFill>
                   <a:srgbClr val="2E7D32"/>
                 </a:solidFill>
-                <a:latin typeface="Trebuchet MS" pitchFamily="34" charset="0"/>
-                <a:ea typeface="Trebuchet MS" pitchFamily="34" charset="-122"/>
-                <a:cs typeface="Trebuchet MS" pitchFamily="34" charset="-120"/>
               </a:rPr>
               <a:t>URBAN (Harare)</a:t>
             </a:r>
-            <a:endParaRPr lang="en-US" sz="2000" dirty="0"/>
-          </a:p>
-        </p:txBody>
-      </p:sp>
-      <p:sp>
-        <p:nvSpPr>
-          <p:cNvPr id="12" name="Text 10"/>
-          <p:cNvSpPr/>
-          <p:nvPr/>
-        </p:nvSpPr>
-        <p:spPr>
-          <a:xfrm>
-            <a:off x="4846320" y="2194560"/>
-            <a:ext cx="3383280" cy="365760"/>
-          </a:xfrm>
-          <a:prstGeom prst="rect">
-            <a:avLst/>
-          </a:prstGeom>
-          <a:noFill/>
-          <a:ln/>
-        </p:spPr>
-        <p:txBody>
-          <a:bodyPr wrap="square" rtlCol="0" anchor="ctr"/>
-          <a:lstStyle/>
-          <a:p>
-            <a:pPr indent="0" marL="0">
-              <a:buNone/>
-            </a:pPr>
-            <a:r>
-              <a:rPr lang="en-US" sz="1400" dirty="0">
+            <a:endParaRPr lang="en-US" sz="2200" dirty="0"/>
+          </a:p>
+        </p:txBody>
+      </p:sp>
+      <p:sp>
+        <p:nvSpPr>
+          <p:cNvPr id="8" name="Text 6"/>
+          <p:cNvSpPr/>
+          <p:nvPr/>
+        </p:nvSpPr>
+        <p:spPr>
+          <a:xfrm>
+            <a:off x="6583680" y="2286000"/>
+            <a:ext cx="4937760" cy="3383280"/>
+          </a:xfrm>
+          <a:prstGeom prst="rect">
+            <a:avLst/>
+          </a:prstGeom>
+          <a:noFill/>
+          <a:ln/>
+        </p:spPr>
+        <p:txBody>
+          <a:bodyPr wrap="square" rtlCol="0" anchor="ctr"/>
+          <a:lstStyle/>
+          <a:p>
+            <a:pPr marL="342900" indent="-342900">
+              <a:spcAft>
+                <a:spcPts val="1000"/>
+              </a:spcAft>
+              <a:buSzPct val="100000"/>
+              <a:buChar char="•"/>
+            </a:pPr>
+            <a:r>
+              <a:rPr lang="en-US" sz="1600" dirty="0">
                 <a:solidFill>
                   <a:srgbClr val="1B1B1B"/>
                 </a:solidFill>
-                <a:latin typeface="Calibri" pitchFamily="34" charset="0"/>
-                <a:ea typeface="Calibri" pitchFamily="34" charset="-122"/>
-                <a:cs typeface="Calibri" pitchFamily="34" charset="-120"/>
-              </a:rPr>
-              <a:t>📶 High-speed Wi-Fi</a:t>
-            </a:r>
-            <a:endParaRPr lang="en-US" sz="1400" dirty="0"/>
-          </a:p>
-        </p:txBody>
-      </p:sp>
-      <p:sp>
-        <p:nvSpPr>
-          <p:cNvPr id="13" name="Text 11"/>
-          <p:cNvSpPr/>
-          <p:nvPr/>
-        </p:nvSpPr>
-        <p:spPr>
-          <a:xfrm>
-            <a:off x="4846320" y="2651760"/>
-            <a:ext cx="3383280" cy="365760"/>
-          </a:xfrm>
-          <a:prstGeom prst="rect">
-            <a:avLst/>
-          </a:prstGeom>
-          <a:noFill/>
-          <a:ln/>
-        </p:spPr>
-        <p:txBody>
-          <a:bodyPr wrap="square" rtlCol="0" anchor="ctr"/>
-          <a:lstStyle/>
-          <a:p>
-            <a:pPr indent="0" marL="0">
-              <a:buNone/>
-            </a:pPr>
-            <a:r>
-              <a:rPr lang="en-US" sz="1400" dirty="0">
+              </a:rPr>
+              <a:t>High-speed Wi-Fi</a:t>
+            </a:r>
+            <a:endParaRPr lang="en-US" sz="1600" dirty="0"/>
+          </a:p>
+          <a:p>
+            <a:pPr marL="342900" indent="-342900">
+              <a:spcAft>
+                <a:spcPts val="1000"/>
+              </a:spcAft>
+              <a:buSzPct val="100000"/>
+              <a:buChar char="•"/>
+            </a:pPr>
+            <a:r>
+              <a:rPr lang="en-US" sz="1600" dirty="0">
                 <a:solidFill>
                   <a:srgbClr val="1B1B1B"/>
                 </a:solidFill>
-                <a:latin typeface="Calibri" pitchFamily="34" charset="0"/>
-                <a:ea typeface="Calibri" pitchFamily="34" charset="-122"/>
-                <a:cs typeface="Calibri" pitchFamily="34" charset="-120"/>
-              </a:rPr>
-              <a:t>💻 Computer labs</a:t>
-            </a:r>
-            <a:endParaRPr lang="en-US" sz="1400" dirty="0"/>
-          </a:p>
-        </p:txBody>
-      </p:sp>
-      <p:sp>
-        <p:nvSpPr>
-          <p:cNvPr id="14" name="Text 12"/>
-          <p:cNvSpPr/>
-          <p:nvPr/>
-        </p:nvSpPr>
-        <p:spPr>
-          <a:xfrm>
-            <a:off x="4846320" y="3108960"/>
-            <a:ext cx="3383280" cy="365760"/>
-          </a:xfrm>
-          <a:prstGeom prst="rect">
-            <a:avLst/>
-          </a:prstGeom>
-          <a:noFill/>
-          <a:ln/>
-        </p:spPr>
-        <p:txBody>
-          <a:bodyPr wrap="square" rtlCol="0" anchor="ctr"/>
-          <a:lstStyle/>
-          <a:p>
-            <a:pPr indent="0" marL="0">
-              <a:buNone/>
-            </a:pPr>
-            <a:r>
-              <a:rPr lang="en-US" sz="1400" dirty="0">
+              </a:rPr>
+              <a:t>Computer labs</a:t>
+            </a:r>
+            <a:endParaRPr lang="en-US" sz="1600" dirty="0"/>
+          </a:p>
+          <a:p>
+            <a:pPr marL="342900" indent="-342900">
+              <a:spcAft>
+                <a:spcPts val="1000"/>
+              </a:spcAft>
+              <a:buSzPct val="100000"/>
+              <a:buChar char="•"/>
+            </a:pPr>
+            <a:r>
+              <a:rPr lang="en-US" sz="1600" dirty="0">
                 <a:solidFill>
                   <a:srgbClr val="1B1B1B"/>
                 </a:solidFill>
-                <a:latin typeface="Calibri" pitchFamily="34" charset="0"/>
-                <a:ea typeface="Calibri" pitchFamily="34" charset="-122"/>
-                <a:cs typeface="Calibri" pitchFamily="34" charset="-120"/>
-              </a:rPr>
-              <a:t>⚡ Stable power supply</a:t>
-            </a:r>
-            <a:endParaRPr lang="en-US" sz="1400" dirty="0"/>
-          </a:p>
-        </p:txBody>
-      </p:sp>
-      <p:sp>
-        <p:nvSpPr>
-          <p:cNvPr id="15" name="Text 13"/>
-          <p:cNvSpPr/>
-          <p:nvPr/>
-        </p:nvSpPr>
-        <p:spPr>
-          <a:xfrm>
-            <a:off x="4846320" y="3566160"/>
-            <a:ext cx="3383280" cy="365760"/>
-          </a:xfrm>
-          <a:prstGeom prst="rect">
-            <a:avLst/>
-          </a:prstGeom>
-          <a:noFill/>
-          <a:ln/>
-        </p:spPr>
-        <p:txBody>
-          <a:bodyPr wrap="square" rtlCol="0" anchor="ctr"/>
-          <a:lstStyle/>
-          <a:p>
-            <a:pPr indent="0" marL="0">
-              <a:buNone/>
-            </a:pPr>
-            <a:r>
-              <a:rPr lang="en-US" sz="1400" dirty="0">
+              </a:rPr>
+              <a:t>Stable power supply</a:t>
+            </a:r>
+            <a:endParaRPr lang="en-US" sz="1600" dirty="0"/>
+          </a:p>
+          <a:p>
+            <a:pPr marL="342900" indent="-342900">
+              <a:spcAft>
+                <a:spcPts val="1000"/>
+              </a:spcAft>
+              <a:buSzPct val="100000"/>
+              <a:buChar char="•"/>
+            </a:pPr>
+            <a:r>
+              <a:rPr lang="en-US" sz="1600" dirty="0">
                 <a:solidFill>
                   <a:srgbClr val="1B1B1B"/>
                 </a:solidFill>
-                <a:latin typeface="Calibri" pitchFamily="34" charset="0"/>
-                <a:ea typeface="Calibri" pitchFamily="34" charset="-122"/>
-                <a:cs typeface="Calibri" pitchFamily="34" charset="-120"/>
-              </a:rPr>
-              <a:t>📊 78% ZIMSEC pass rate</a:t>
-            </a:r>
-            <a:endParaRPr lang="en-US" sz="1400" dirty="0"/>
-          </a:p>
-        </p:txBody>
-      </p:sp>
-      <p:sp>
-        <p:nvSpPr>
-          <p:cNvPr id="16" name="Text 14"/>
-          <p:cNvSpPr/>
-          <p:nvPr/>
-        </p:nvSpPr>
-        <p:spPr>
-          <a:xfrm>
-            <a:off x="4846320" y="4023360"/>
-            <a:ext cx="3383280" cy="365760"/>
-          </a:xfrm>
-          <a:prstGeom prst="rect">
-            <a:avLst/>
-          </a:prstGeom>
-          <a:noFill/>
-          <a:ln/>
-        </p:spPr>
-        <p:txBody>
-          <a:bodyPr wrap="square" rtlCol="0" anchor="ctr"/>
-          <a:lstStyle/>
-          <a:p>
-            <a:pPr indent="0" marL="0">
-              <a:buNone/>
-            </a:pPr>
-            <a:r>
-              <a:rPr lang="en-US" sz="1400" dirty="0">
+              </a:rPr>
+              <a:t>~78% ZIMSEC pass rate</a:t>
+            </a:r>
+            <a:endParaRPr lang="en-US" sz="1600" dirty="0"/>
+          </a:p>
+          <a:p>
+            <a:pPr marL="342900" indent="-342900">
+              <a:spcAft>
+                <a:spcPts val="1000"/>
+              </a:spcAft>
+              <a:buSzPct val="100000"/>
+              <a:buChar char="•"/>
+            </a:pPr>
+            <a:r>
+              <a:rPr lang="en-US" sz="1600" dirty="0">
                 <a:solidFill>
                   <a:srgbClr val="1B1B1B"/>
                 </a:solidFill>
-                <a:latin typeface="Calibri" pitchFamily="34" charset="0"/>
-                <a:ea typeface="Calibri" pitchFamily="34" charset="-122"/>
-                <a:cs typeface="Calibri" pitchFamily="34" charset="-120"/>
-              </a:rPr>
-              <a:t>🎓 Private tutors available</a:t>
-            </a:r>
-            <a:endParaRPr lang="en-US" sz="1400" dirty="0"/>
+              </a:rPr>
+              <a:t>Private tutors available</a:t>
+            </a:r>
+            <a:endParaRPr lang="en-US" sz="1600" dirty="0"/>
           </a:p>
         </p:txBody>
       </p:sp>
@@ -2327,8 +2182,8 @@
         </p:nvSpPr>
         <p:spPr>
           <a:xfrm>
-            <a:off x="457200" y="457200"/>
-            <a:ext cx="8229600" cy="640080"/>
+            <a:off x="457200" y="365760"/>
+            <a:ext cx="11247120" cy="731520"/>
           </a:xfrm>
           <a:prstGeom prst="rect">
             <a:avLst/>
@@ -2344,7 +2199,7 @@
               <a:buNone/>
             </a:pPr>
             <a:r>
-              <a:rPr lang="en-US" sz="4400" b="1" dirty="0">
+              <a:rPr lang="en-US" sz="3800" b="1" dirty="0">
                 <a:solidFill>
                   <a:srgbClr val="FFFFFF"/>
                 </a:solidFill>
@@ -2352,9 +2207,9 @@
                 <a:ea typeface="Georgia" pitchFamily="34" charset="-122"/>
                 <a:cs typeface="Georgia" pitchFamily="34" charset="-120"/>
               </a:rPr>
-              <a:t>THE CURE: Our 3 Innovations</a:t>
-            </a:r>
-            <a:endParaRPr lang="en-US" sz="4400" dirty="0"/>
+              <a:t>THE CURE: Our 3 Core Innovations</a:t>
+            </a:r>
+            <a:endParaRPr lang="en-US" sz="3800" dirty="0"/>
           </a:p>
         </p:txBody>
       </p:sp>
@@ -2367,7 +2222,7 @@
         <p:spPr>
           <a:xfrm>
             <a:off x="457200" y="1371600"/>
-            <a:ext cx="8229600" cy="1097280"/>
+            <a:ext cx="11247120" cy="1371600"/>
           </a:xfrm>
           <a:prstGeom prst="rect">
             <a:avLst/>
@@ -2391,8 +2246,8 @@
         </p:nvSpPr>
         <p:spPr>
           <a:xfrm>
-            <a:off x="640080" y="1508760"/>
-            <a:ext cx="731520" cy="731520"/>
+            <a:off x="685800" y="1691640"/>
+            <a:ext cx="777240" cy="777240"/>
           </a:xfrm>
           <a:prstGeom prst="ellipse">
             <a:avLst/>
@@ -2411,8 +2266,8 @@
         </p:nvSpPr>
         <p:spPr>
           <a:xfrm>
-            <a:off x="640080" y="1508760"/>
-            <a:ext cx="731520" cy="731520"/>
+            <a:off x="685800" y="1691640"/>
+            <a:ext cx="777240" cy="777240"/>
           </a:xfrm>
           <a:prstGeom prst="rect">
             <a:avLst/>
@@ -2450,8 +2305,8 @@
         </p:nvSpPr>
         <p:spPr>
           <a:xfrm>
-            <a:off x="1554480" y="1508760"/>
-            <a:ext cx="6858000" cy="365760"/>
+            <a:off x="1691640" y="1554480"/>
+            <a:ext cx="9692640" cy="457200"/>
           </a:xfrm>
           <a:prstGeom prst="rect">
             <a:avLst/>
@@ -2471,11 +2326,8 @@
                 <a:solidFill>
                   <a:srgbClr val="1B1B1B"/>
                 </a:solidFill>
-                <a:latin typeface="Trebuchet MS" pitchFamily="34" charset="0"/>
-                <a:ea typeface="Trebuchet MS" pitchFamily="34" charset="-122"/>
-                <a:cs typeface="Trebuchet MS" pitchFamily="34" charset="-120"/>
-              </a:rPr>
-              <a:t>Village Hub: Local Raspberry Pi Wi-Fi Server</a:t>
+              </a:rPr>
+              <a:t>Village Hub: Raspberry Pi Wi-Fi Server</a:t>
             </a:r>
             <a:endParaRPr lang="en-US" sz="2000" dirty="0"/>
           </a:p>
@@ -2489,8 +2341,8 @@
         </p:nvSpPr>
         <p:spPr>
           <a:xfrm>
-            <a:off x="1554480" y="1874520"/>
-            <a:ext cx="6858000" cy="320040"/>
+            <a:off x="1691640" y="2011680"/>
+            <a:ext cx="9692640" cy="548640"/>
           </a:xfrm>
           <a:prstGeom prst="rect">
             <a:avLst/>
@@ -2510,11 +2362,8 @@
                 <a:solidFill>
                   <a:srgbClr val="424242"/>
                 </a:solidFill>
-                <a:latin typeface="Calibri" pitchFamily="34" charset="0"/>
-                <a:ea typeface="Calibri" pitchFamily="34" charset="-122"/>
-                <a:cs typeface="Calibri" pitchFamily="34" charset="-120"/>
-              </a:rPr>
-              <a:t>Hosts ZIMSEC curriculum + offline AI. Runs on car battery. Zero internet needed.</a:t>
+              </a:rPr>
+              <a:t>Hosts ZIMSEC curriculum + offline AI tutor. Runs on a car battery. Zero internet connection needed.</a:t>
             </a:r>
             <a:endParaRPr lang="en-US" sz="1400" dirty="0"/>
           </a:p>
@@ -2528,8 +2377,8 @@
         </p:nvSpPr>
         <p:spPr>
           <a:xfrm>
-            <a:off x="457200" y="2651760"/>
-            <a:ext cx="8229600" cy="1097280"/>
+            <a:off x="457200" y="2971800"/>
+            <a:ext cx="11247120" cy="1371600"/>
           </a:xfrm>
           <a:prstGeom prst="rect">
             <a:avLst/>
@@ -2553,8 +2402,8 @@
         </p:nvSpPr>
         <p:spPr>
           <a:xfrm>
-            <a:off x="640080" y="2788920"/>
-            <a:ext cx="731520" cy="731520"/>
+            <a:off x="685800" y="3291840"/>
+            <a:ext cx="777240" cy="777240"/>
           </a:xfrm>
           <a:prstGeom prst="ellipse">
             <a:avLst/>
@@ -2573,8 +2422,8 @@
         </p:nvSpPr>
         <p:spPr>
           <a:xfrm>
-            <a:off x="640080" y="2788920"/>
-            <a:ext cx="731520" cy="731520"/>
+            <a:off x="685800" y="3291840"/>
+            <a:ext cx="777240" cy="777240"/>
           </a:xfrm>
           <a:prstGeom prst="rect">
             <a:avLst/>
@@ -2612,8 +2461,8 @@
         </p:nvSpPr>
         <p:spPr>
           <a:xfrm>
-            <a:off x="1554480" y="2788920"/>
-            <a:ext cx="6858000" cy="365760"/>
+            <a:off x="1691640" y="3154680"/>
+            <a:ext cx="9692640" cy="457200"/>
           </a:xfrm>
           <a:prstGeom prst="rect">
             <a:avLst/>
@@ -2633,11 +2482,8 @@
                 <a:solidFill>
                   <a:srgbClr val="1B1B1B"/>
                 </a:solidFill>
-                <a:latin typeface="Trebuchet MS" pitchFamily="34" charset="0"/>
-                <a:ea typeface="Trebuchet MS" pitchFamily="34" charset="-122"/>
-                <a:cs typeface="Trebuchet MS" pitchFamily="34" charset="-120"/>
-              </a:rPr>
-              <a:t>Data Mule Sync: "The Bus is Our Fiber Cable"</a:t>
+              </a:rPr>
+              <a:t>Data Mule Sync: "The Bus Is Our Fibre Cable"</a:t>
             </a:r>
             <a:endParaRPr lang="en-US" sz="2000" dirty="0"/>
           </a:p>
@@ -2651,8 +2497,8 @@
         </p:nvSpPr>
         <p:spPr>
           <a:xfrm>
-            <a:off x="1554480" y="3154680"/>
-            <a:ext cx="6858000" cy="320040"/>
+            <a:off x="1691640" y="3611880"/>
+            <a:ext cx="9692640" cy="548640"/>
           </a:xfrm>
           <a:prstGeom prst="rect">
             <a:avLst/>
@@ -2672,11 +2518,8 @@
                 <a:solidFill>
                   <a:srgbClr val="424242"/>
                 </a:solidFill>
-                <a:latin typeface="Calibri" pitchFamily="34" charset="0"/>
-                <a:ea typeface="Calibri" pitchFamily="34" charset="-122"/>
-                <a:cs typeface="Calibri" pitchFamily="34" charset="-120"/>
-              </a:rPr>
-              <a:t>Teacher travels to town → phone auto-downloads updates → returns → auto-syncs with Village Hub.</a:t>
+              </a:rPr>
+              <a:t>Teacher's phone or a USB drive on the daily commuter omnibus carries updates to and from town.</a:t>
             </a:r>
             <a:endParaRPr lang="en-US" sz="1400" dirty="0"/>
           </a:p>
@@ -2690,8 +2533,8 @@
         </p:nvSpPr>
         <p:spPr>
           <a:xfrm>
-            <a:off x="457200" y="3931920"/>
-            <a:ext cx="8229600" cy="1097280"/>
+            <a:off x="457200" y="4572000"/>
+            <a:ext cx="11247120" cy="1371600"/>
           </a:xfrm>
           <a:prstGeom prst="rect">
             <a:avLst/>
@@ -2715,8 +2558,8 @@
         </p:nvSpPr>
         <p:spPr>
           <a:xfrm>
-            <a:off x="640080" y="4069080"/>
-            <a:ext cx="731520" cy="731520"/>
+            <a:off x="685800" y="4892040"/>
+            <a:ext cx="777240" cy="777240"/>
           </a:xfrm>
           <a:prstGeom prst="ellipse">
             <a:avLst/>
@@ -2735,8 +2578,8 @@
         </p:nvSpPr>
         <p:spPr>
           <a:xfrm>
-            <a:off x="640080" y="4069080"/>
-            <a:ext cx="731520" cy="731520"/>
+            <a:off x="685800" y="4892040"/>
+            <a:ext cx="777240" cy="777240"/>
           </a:xfrm>
           <a:prstGeom prst="rect">
             <a:avLst/>
@@ -2774,8 +2617,8 @@
         </p:nvSpPr>
         <p:spPr>
           <a:xfrm>
-            <a:off x="1554480" y="4069080"/>
-            <a:ext cx="6858000" cy="365760"/>
+            <a:off x="1691640" y="4754880"/>
+            <a:ext cx="9692640" cy="457200"/>
           </a:xfrm>
           <a:prstGeom prst="rect">
             <a:avLst/>
@@ -2795,11 +2638,8 @@
                 <a:solidFill>
                   <a:srgbClr val="1B1B1B"/>
                 </a:solidFill>
-                <a:latin typeface="Trebuchet MS" pitchFamily="34" charset="0"/>
-                <a:ea typeface="Trebuchet MS" pitchFamily="34" charset="-122"/>
-                <a:cs typeface="Trebuchet MS" pitchFamily="34" charset="-120"/>
-              </a:rPr>
-              <a:t>Gamified P2P Sharing: Wi-Fi Direct + Edu-Coins</a:t>
+              </a:rPr>
+              <a:t>Gamified P2P Sharing + Real Content Library</a:t>
             </a:r>
             <a:endParaRPr lang="en-US" sz="2000" dirty="0"/>
           </a:p>
@@ -2813,8 +2653,8 @@
         </p:nvSpPr>
         <p:spPr>
           <a:xfrm>
-            <a:off x="1554480" y="4434840"/>
-            <a:ext cx="6858000" cy="320040"/>
+            <a:off x="1691640" y="5212080"/>
+            <a:ext cx="9692640" cy="548640"/>
           </a:xfrm>
           <a:prstGeom prst="rect">
             <a:avLst/>
@@ -2834,11 +2674,8 @@
                 <a:solidFill>
                   <a:srgbClr val="424242"/>
                 </a:solidFill>
-                <a:latin typeface="Calibri" pitchFamily="34" charset="0"/>
-                <a:ea typeface="Calibri" pitchFamily="34" charset="-122"/>
-                <a:cs typeface="Calibri" pitchFamily="34" charset="-120"/>
-              </a:rPr>
-              <a:t>Students share lessons like SHAREit. Earn Edu-Coins for every share. Zero data cost.</a:t>
+              </a:rPr>
+              <a:t>Students share lessons via Wi-Fi Direct and earn Edu-Coins — shared content actually appears in their library.</a:t>
             </a:r>
             <a:endParaRPr lang="en-US" sz="1400" dirty="0"/>
           </a:p>
@@ -2855,6 +2692,1009 @@
 <file path=ppt/slides/slide4.xml><?xml version="1.0" encoding="utf-8"?>
 <p:sld xmlns:a="http://schemas.openxmlformats.org/drawingml/2006/main" xmlns:r="http://schemas.openxmlformats.org/officeDocument/2006/relationships" xmlns:p="http://schemas.openxmlformats.org/presentationml/2006/main">
   <p:cSld name="Slide 4">
+    <p:bg>
+      <p:bgPr>
+        <a:solidFill>
+          <a:srgbClr val="1B1B1B"/>
+        </a:solidFill>
+      </p:bgPr>
+    </p:bg>
+    <p:spTree>
+      <p:nvGrpSpPr>
+        <p:cNvPr id="1" name=""/>
+        <p:cNvGrpSpPr/>
+        <p:nvPr/>
+      </p:nvGrpSpPr>
+      <p:grpSpPr>
+        <a:xfrm>
+          <a:off x="0" y="0"/>
+          <a:ext cx="0" cy="0"/>
+          <a:chOff x="0" y="0"/>
+          <a:chExt cx="0" cy="0"/>
+        </a:xfrm>
+      </p:grpSpPr>
+      <p:sp>
+        <p:nvSpPr>
+          <p:cNvPr id="2" name="Text 0"/>
+          <p:cNvSpPr/>
+          <p:nvPr/>
+        </p:nvSpPr>
+        <p:spPr>
+          <a:xfrm>
+            <a:off x="457200" y="365760"/>
+            <a:ext cx="11247120" cy="731520"/>
+          </a:xfrm>
+          <a:prstGeom prst="rect">
+            <a:avLst/>
+          </a:prstGeom>
+          <a:noFill/>
+          <a:ln/>
+        </p:spPr>
+        <p:txBody>
+          <a:bodyPr wrap="square" rtlCol="0" anchor="ctr"/>
+          <a:lstStyle/>
+          <a:p>
+            <a:pPr indent="0" marL="0">
+              <a:buNone/>
+            </a:pPr>
+            <a:r>
+              <a:rPr lang="en-US" sz="3200" b="1" dirty="0">
+                <a:solidFill>
+                  <a:srgbClr val="FFFFFF"/>
+                </a:solidFill>
+                <a:latin typeface="Georgia" pitchFamily="34" charset="0"/>
+                <a:ea typeface="Georgia" pitchFamily="34" charset="-122"/>
+                <a:cs typeface="Georgia" pitchFamily="34" charset="-120"/>
+              </a:rPr>
+              <a:t>THIS ISN'T A MOCKUP — IT'S WORKING SOFTWARE</a:t>
+            </a:r>
+            <a:endParaRPr lang="en-US" sz="3200" dirty="0"/>
+          </a:p>
+        </p:txBody>
+      </p:sp>
+      <p:sp>
+        <p:nvSpPr>
+          <p:cNvPr id="3" name="Text 1"/>
+          <p:cNvSpPr/>
+          <p:nvPr/>
+        </p:nvSpPr>
+        <p:spPr>
+          <a:xfrm>
+            <a:off x="457200" y="1097280"/>
+            <a:ext cx="11247120" cy="365760"/>
+          </a:xfrm>
+          <a:prstGeom prst="rect">
+            <a:avLst/>
+          </a:prstGeom>
+          <a:noFill/>
+          <a:ln/>
+        </p:spPr>
+        <p:txBody>
+          <a:bodyPr wrap="square" rtlCol="0" anchor="ctr"/>
+          <a:lstStyle/>
+          <a:p>
+            <a:pPr indent="0" marL="0">
+              <a:buNone/>
+            </a:pPr>
+            <a:r>
+              <a:rPr lang="en-US" sz="1600" i="1" dirty="0">
+                <a:solidFill>
+                  <a:srgbClr val="FDD835"/>
+                </a:solidFill>
+              </a:rPr>
+              <a:t>What most hackathon demos show you vs. what we built:</a:t>
+            </a:r>
+            <a:endParaRPr lang="en-US" sz="1600" dirty="0"/>
+          </a:p>
+        </p:txBody>
+      </p:sp>
+      <p:sp>
+        <p:nvSpPr>
+          <p:cNvPr id="4" name="Shape 2"/>
+          <p:cNvSpPr/>
+          <p:nvPr/>
+        </p:nvSpPr>
+        <p:spPr>
+          <a:xfrm>
+            <a:off x="457200" y="1645920"/>
+            <a:ext cx="11247120" cy="502920"/>
+          </a:xfrm>
+          <a:prstGeom prst="rect">
+            <a:avLst/>
+          </a:prstGeom>
+          <a:solidFill>
+            <a:srgbClr val="B85042"/>
+          </a:solidFill>
+          <a:ln/>
+        </p:spPr>
+      </p:sp>
+      <p:sp>
+        <p:nvSpPr>
+          <p:cNvPr id="5" name="Text 3"/>
+          <p:cNvSpPr/>
+          <p:nvPr/>
+        </p:nvSpPr>
+        <p:spPr>
+          <a:xfrm>
+            <a:off x="640080" y="1691640"/>
+            <a:ext cx="5029200" cy="411480"/>
+          </a:xfrm>
+          <a:prstGeom prst="rect">
+            <a:avLst/>
+          </a:prstGeom>
+          <a:noFill/>
+          <a:ln/>
+        </p:spPr>
+        <p:txBody>
+          <a:bodyPr wrap="square" rtlCol="0" anchor="ctr"/>
+          <a:lstStyle/>
+          <a:p>
+            <a:pPr indent="0" marL="0">
+              <a:buNone/>
+            </a:pPr>
+            <a:r>
+              <a:rPr lang="en-US" sz="1500" b="1" dirty="0">
+                <a:solidFill>
+                  <a:srgbClr val="FFFFFF"/>
+                </a:solidFill>
+              </a:rPr>
+              <a:t>Capability</a:t>
+            </a:r>
+            <a:endParaRPr lang="en-US" sz="1500" dirty="0"/>
+          </a:p>
+        </p:txBody>
+      </p:sp>
+      <p:sp>
+        <p:nvSpPr>
+          <p:cNvPr id="6" name="Text 4"/>
+          <p:cNvSpPr/>
+          <p:nvPr/>
+        </p:nvSpPr>
+        <p:spPr>
+          <a:xfrm>
+            <a:off x="5669280" y="1691640"/>
+            <a:ext cx="2926080" cy="411480"/>
+          </a:xfrm>
+          <a:prstGeom prst="rect">
+            <a:avLst/>
+          </a:prstGeom>
+          <a:noFill/>
+          <a:ln/>
+        </p:spPr>
+        <p:txBody>
+          <a:bodyPr wrap="square" rtlCol="0" anchor="ctr"/>
+          <a:lstStyle/>
+          <a:p>
+            <a:pPr algn="ctr" indent="0" marL="0">
+              <a:buNone/>
+            </a:pPr>
+            <a:r>
+              <a:rPr lang="en-US" sz="1500" b="1" dirty="0">
+                <a:solidFill>
+                  <a:srgbClr val="FFFFFF"/>
+                </a:solidFill>
+              </a:rPr>
+              <a:t>Typical Hackathon Demo</a:t>
+            </a:r>
+            <a:endParaRPr lang="en-US" sz="1500" dirty="0"/>
+          </a:p>
+        </p:txBody>
+      </p:sp>
+      <p:sp>
+        <p:nvSpPr>
+          <p:cNvPr id="7" name="Text 5"/>
+          <p:cNvSpPr/>
+          <p:nvPr/>
+        </p:nvSpPr>
+        <p:spPr>
+          <a:xfrm>
+            <a:off x="8595360" y="1691640"/>
+            <a:ext cx="2926080" cy="411480"/>
+          </a:xfrm>
+          <a:prstGeom prst="rect">
+            <a:avLst/>
+          </a:prstGeom>
+          <a:noFill/>
+          <a:ln/>
+        </p:spPr>
+        <p:txBody>
+          <a:bodyPr wrap="square" rtlCol="0" anchor="ctr"/>
+          <a:lstStyle/>
+          <a:p>
+            <a:pPr algn="ctr" indent="0" marL="0">
+              <a:buNone/>
+            </a:pPr>
+            <a:r>
+              <a:rPr lang="en-US" sz="1500" b="1" dirty="0">
+                <a:solidFill>
+                  <a:srgbClr val="FFFFFF"/>
+                </a:solidFill>
+              </a:rPr>
+              <a:t>Edu-Sync Mesh (Today)</a:t>
+            </a:r>
+            <a:endParaRPr lang="en-US" sz="1500" dirty="0"/>
+          </a:p>
+        </p:txBody>
+      </p:sp>
+      <p:sp>
+        <p:nvSpPr>
+          <p:cNvPr id="8" name="Shape 6"/>
+          <p:cNvSpPr/>
+          <p:nvPr/>
+        </p:nvSpPr>
+        <p:spPr>
+          <a:xfrm>
+            <a:off x="457200" y="2194560"/>
+            <a:ext cx="11247120" cy="530352"/>
+          </a:xfrm>
+          <a:prstGeom prst="rect">
+            <a:avLst/>
+          </a:prstGeom>
+          <a:solidFill>
+            <a:srgbClr val="F5F5F5"/>
+          </a:solidFill>
+          <a:ln/>
+        </p:spPr>
+      </p:sp>
+      <p:sp>
+        <p:nvSpPr>
+          <p:cNvPr id="9" name="Text 7"/>
+          <p:cNvSpPr/>
+          <p:nvPr/>
+        </p:nvSpPr>
+        <p:spPr>
+          <a:xfrm>
+            <a:off x="640080" y="2249424"/>
+            <a:ext cx="5029200" cy="420624"/>
+          </a:xfrm>
+          <a:prstGeom prst="rect">
+            <a:avLst/>
+          </a:prstGeom>
+          <a:noFill/>
+          <a:ln/>
+        </p:spPr>
+        <p:txBody>
+          <a:bodyPr wrap="square" rtlCol="0" anchor="ctr"/>
+          <a:lstStyle/>
+          <a:p>
+            <a:pPr indent="0" marL="0">
+              <a:buNone/>
+            </a:pPr>
+            <a:r>
+              <a:rPr lang="en-US" sz="1300" b="1" dirty="0">
+                <a:solidFill>
+                  <a:srgbClr val="1B1B1B"/>
+                </a:solidFill>
+              </a:rPr>
+              <a:t>Backend / Storage</a:t>
+            </a:r>
+            <a:endParaRPr lang="en-US" sz="1300" dirty="0"/>
+          </a:p>
+        </p:txBody>
+      </p:sp>
+      <p:sp>
+        <p:nvSpPr>
+          <p:cNvPr id="10" name="Text 8"/>
+          <p:cNvSpPr/>
+          <p:nvPr/>
+        </p:nvSpPr>
+        <p:spPr>
+          <a:xfrm>
+            <a:off x="5669280" y="2249424"/>
+            <a:ext cx="2926080" cy="420624"/>
+          </a:xfrm>
+          <a:prstGeom prst="rect">
+            <a:avLst/>
+          </a:prstGeom>
+          <a:noFill/>
+          <a:ln/>
+        </p:spPr>
+        <p:txBody>
+          <a:bodyPr wrap="square" rtlCol="0" anchor="ctr"/>
+          <a:lstStyle/>
+          <a:p>
+            <a:pPr algn="ctr" indent="0" marL="0">
+              <a:buNone/>
+            </a:pPr>
+            <a:r>
+              <a:rPr lang="en-US" sz="1200" dirty="0">
+                <a:solidFill>
+                  <a:srgbClr val="C62828"/>
+                </a:solidFill>
+              </a:rPr>
+              <a:t>Simulated in-browser state</a:t>
+            </a:r>
+            <a:endParaRPr lang="en-US" sz="1200" dirty="0"/>
+          </a:p>
+        </p:txBody>
+      </p:sp>
+      <p:sp>
+        <p:nvSpPr>
+          <p:cNvPr id="11" name="Text 9"/>
+          <p:cNvSpPr/>
+          <p:nvPr/>
+        </p:nvSpPr>
+        <p:spPr>
+          <a:xfrm>
+            <a:off x="8595360" y="2249424"/>
+            <a:ext cx="2926080" cy="420624"/>
+          </a:xfrm>
+          <a:prstGeom prst="rect">
+            <a:avLst/>
+          </a:prstGeom>
+          <a:noFill/>
+          <a:ln/>
+        </p:spPr>
+        <p:txBody>
+          <a:bodyPr wrap="square" rtlCol="0" anchor="ctr"/>
+          <a:lstStyle/>
+          <a:p>
+            <a:pPr algn="ctr" indent="0" marL="0">
+              <a:buNone/>
+            </a:pPr>
+            <a:r>
+              <a:rPr lang="en-US" sz="1200" b="1" dirty="0">
+                <a:solidFill>
+                  <a:srgbClr val="2E7D32"/>
+                </a:solidFill>
+              </a:rPr>
+              <a:t>Real Express server, file-persisted</a:t>
+            </a:r>
+            <a:endParaRPr lang="en-US" sz="1200" dirty="0"/>
+          </a:p>
+        </p:txBody>
+      </p:sp>
+      <p:sp>
+        <p:nvSpPr>
+          <p:cNvPr id="12" name="Shape 10"/>
+          <p:cNvSpPr/>
+          <p:nvPr/>
+        </p:nvSpPr>
+        <p:spPr>
+          <a:xfrm>
+            <a:off x="457200" y="2761488"/>
+            <a:ext cx="11247120" cy="530352"/>
+          </a:xfrm>
+          <a:prstGeom prst="rect">
+            <a:avLst/>
+          </a:prstGeom>
+          <a:solidFill>
+            <a:srgbClr val="FFFFFF"/>
+          </a:solidFill>
+          <a:ln/>
+        </p:spPr>
+      </p:sp>
+      <p:sp>
+        <p:nvSpPr>
+          <p:cNvPr id="13" name="Text 11"/>
+          <p:cNvSpPr/>
+          <p:nvPr/>
+        </p:nvSpPr>
+        <p:spPr>
+          <a:xfrm>
+            <a:off x="640080" y="2816352"/>
+            <a:ext cx="5029200" cy="420624"/>
+          </a:xfrm>
+          <a:prstGeom prst="rect">
+            <a:avLst/>
+          </a:prstGeom>
+          <a:noFill/>
+          <a:ln/>
+        </p:spPr>
+        <p:txBody>
+          <a:bodyPr wrap="square" rtlCol="0" anchor="ctr"/>
+          <a:lstStyle/>
+          <a:p>
+            <a:pPr indent="0" marL="0">
+              <a:buNone/>
+            </a:pPr>
+            <a:r>
+              <a:rPr lang="en-US" sz="1300" b="1" dirty="0">
+                <a:solidFill>
+                  <a:srgbClr val="1B1B1B"/>
+                </a:solidFill>
+              </a:rPr>
+              <a:t>AI Tutor answers</a:t>
+            </a:r>
+            <a:endParaRPr lang="en-US" sz="1300" dirty="0"/>
+          </a:p>
+        </p:txBody>
+      </p:sp>
+      <p:sp>
+        <p:nvSpPr>
+          <p:cNvPr id="14" name="Text 12"/>
+          <p:cNvSpPr/>
+          <p:nvPr/>
+        </p:nvSpPr>
+        <p:spPr>
+          <a:xfrm>
+            <a:off x="5669280" y="2816352"/>
+            <a:ext cx="2926080" cy="420624"/>
+          </a:xfrm>
+          <a:prstGeom prst="rect">
+            <a:avLst/>
+          </a:prstGeom>
+          <a:noFill/>
+          <a:ln/>
+        </p:spPr>
+        <p:txBody>
+          <a:bodyPr wrap="square" rtlCol="0" anchor="ctr"/>
+          <a:lstStyle/>
+          <a:p>
+            <a:pPr algn="ctr" indent="0" marL="0">
+              <a:buNone/>
+            </a:pPr>
+            <a:r>
+              <a:rPr lang="en-US" sz="1200" dirty="0">
+                <a:solidFill>
+                  <a:srgbClr val="C62828"/>
+                </a:solidFill>
+              </a:rPr>
+              <a:t>Pre-scripted responses</a:t>
+            </a:r>
+            <a:endParaRPr lang="en-US" sz="1200" dirty="0"/>
+          </a:p>
+        </p:txBody>
+      </p:sp>
+      <p:sp>
+        <p:nvSpPr>
+          <p:cNvPr id="15" name="Text 13"/>
+          <p:cNvSpPr/>
+          <p:nvPr/>
+        </p:nvSpPr>
+        <p:spPr>
+          <a:xfrm>
+            <a:off x="8595360" y="2816352"/>
+            <a:ext cx="2926080" cy="420624"/>
+          </a:xfrm>
+          <a:prstGeom prst="rect">
+            <a:avLst/>
+          </a:prstGeom>
+          <a:noFill/>
+          <a:ln/>
+        </p:spPr>
+        <p:txBody>
+          <a:bodyPr wrap="square" rtlCol="0" anchor="ctr"/>
+          <a:lstStyle/>
+          <a:p>
+            <a:pPr algn="ctr" indent="0" marL="0">
+              <a:buNone/>
+            </a:pPr>
+            <a:r>
+              <a:rPr lang="en-US" sz="1200" b="1" dirty="0">
+                <a:solidFill>
+                  <a:srgbClr val="2E7D32"/>
+                </a:solidFill>
+              </a:rPr>
+              <a:t>Keyword-matched, extensible knowledge base</a:t>
+            </a:r>
+            <a:endParaRPr lang="en-US" sz="1200" dirty="0"/>
+          </a:p>
+        </p:txBody>
+      </p:sp>
+      <p:sp>
+        <p:nvSpPr>
+          <p:cNvPr id="16" name="Shape 14"/>
+          <p:cNvSpPr/>
+          <p:nvPr/>
+        </p:nvSpPr>
+        <p:spPr>
+          <a:xfrm>
+            <a:off x="457200" y="3328416"/>
+            <a:ext cx="11247120" cy="530352"/>
+          </a:xfrm>
+          <a:prstGeom prst="rect">
+            <a:avLst/>
+          </a:prstGeom>
+          <a:solidFill>
+            <a:srgbClr val="F5F5F5"/>
+          </a:solidFill>
+          <a:ln/>
+        </p:spPr>
+      </p:sp>
+      <p:sp>
+        <p:nvSpPr>
+          <p:cNvPr id="17" name="Text 15"/>
+          <p:cNvSpPr/>
+          <p:nvPr/>
+        </p:nvSpPr>
+        <p:spPr>
+          <a:xfrm>
+            <a:off x="640080" y="3383280"/>
+            <a:ext cx="5029200" cy="420624"/>
+          </a:xfrm>
+          <a:prstGeom prst="rect">
+            <a:avLst/>
+          </a:prstGeom>
+          <a:noFill/>
+          <a:ln/>
+        </p:spPr>
+        <p:txBody>
+          <a:bodyPr wrap="square" rtlCol="0" anchor="ctr"/>
+          <a:lstStyle/>
+          <a:p>
+            <a:pPr indent="0" marL="0">
+              <a:buNone/>
+            </a:pPr>
+            <a:r>
+              <a:rPr lang="en-US" sz="1300" b="1" dirty="0">
+                <a:solidFill>
+                  <a:srgbClr val="1B1B1B"/>
+                </a:solidFill>
+              </a:rPr>
+              <a:t>Unknown questions</a:t>
+            </a:r>
+            <a:endParaRPr lang="en-US" sz="1300" dirty="0"/>
+          </a:p>
+        </p:txBody>
+      </p:sp>
+      <p:sp>
+        <p:nvSpPr>
+          <p:cNvPr id="18" name="Text 16"/>
+          <p:cNvSpPr/>
+          <p:nvPr/>
+        </p:nvSpPr>
+        <p:spPr>
+          <a:xfrm>
+            <a:off x="5669280" y="3383280"/>
+            <a:ext cx="2926080" cy="420624"/>
+          </a:xfrm>
+          <a:prstGeom prst="rect">
+            <a:avLst/>
+          </a:prstGeom>
+          <a:noFill/>
+          <a:ln/>
+        </p:spPr>
+        <p:txBody>
+          <a:bodyPr wrap="square" rtlCol="0" anchor="ctr"/>
+          <a:lstStyle/>
+          <a:p>
+            <a:pPr algn="ctr" indent="0" marL="0">
+              <a:buNone/>
+            </a:pPr>
+            <a:r>
+              <a:rPr lang="en-US" sz="1200" dirty="0">
+                <a:solidFill>
+                  <a:srgbClr val="C62828"/>
+                </a:solidFill>
+              </a:rPr>
+              <a:t>Silently fails or fakes it</a:t>
+            </a:r>
+            <a:endParaRPr lang="en-US" sz="1200" dirty="0"/>
+          </a:p>
+        </p:txBody>
+      </p:sp>
+      <p:sp>
+        <p:nvSpPr>
+          <p:cNvPr id="19" name="Text 17"/>
+          <p:cNvSpPr/>
+          <p:nvPr/>
+        </p:nvSpPr>
+        <p:spPr>
+          <a:xfrm>
+            <a:off x="8595360" y="3383280"/>
+            <a:ext cx="2926080" cy="420624"/>
+          </a:xfrm>
+          <a:prstGeom prst="rect">
+            <a:avLst/>
+          </a:prstGeom>
+          <a:noFill/>
+          <a:ln/>
+        </p:spPr>
+        <p:txBody>
+          <a:bodyPr wrap="square" rtlCol="0" anchor="ctr"/>
+          <a:lstStyle/>
+          <a:p>
+            <a:pPr algn="ctr" indent="0" marL="0">
+              <a:buNone/>
+            </a:pPr>
+            <a:r>
+              <a:rPr lang="en-US" sz="1200" b="1" dirty="0">
+                <a:solidFill>
+                  <a:srgbClr val="2E7D32"/>
+                </a:solidFill>
+              </a:rPr>
+              <a:t>Honestly flags gaps, queues for real sync</a:t>
+            </a:r>
+            <a:endParaRPr lang="en-US" sz="1200" dirty="0"/>
+          </a:p>
+        </p:txBody>
+      </p:sp>
+      <p:sp>
+        <p:nvSpPr>
+          <p:cNvPr id="20" name="Shape 18"/>
+          <p:cNvSpPr/>
+          <p:nvPr/>
+        </p:nvSpPr>
+        <p:spPr>
+          <a:xfrm>
+            <a:off x="457200" y="3895344"/>
+            <a:ext cx="11247120" cy="530352"/>
+          </a:xfrm>
+          <a:prstGeom prst="rect">
+            <a:avLst/>
+          </a:prstGeom>
+          <a:solidFill>
+            <a:srgbClr val="FFFFFF"/>
+          </a:solidFill>
+          <a:ln/>
+        </p:spPr>
+      </p:sp>
+      <p:sp>
+        <p:nvSpPr>
+          <p:cNvPr id="21" name="Text 19"/>
+          <p:cNvSpPr/>
+          <p:nvPr/>
+        </p:nvSpPr>
+        <p:spPr>
+          <a:xfrm>
+            <a:off x="640080" y="3950208"/>
+            <a:ext cx="5029200" cy="420624"/>
+          </a:xfrm>
+          <a:prstGeom prst="rect">
+            <a:avLst/>
+          </a:prstGeom>
+          <a:noFill/>
+          <a:ln/>
+        </p:spPr>
+        <p:txBody>
+          <a:bodyPr wrap="square" rtlCol="0" anchor="ctr"/>
+          <a:lstStyle/>
+          <a:p>
+            <a:pPr indent="0" marL="0">
+              <a:buNone/>
+            </a:pPr>
+            <a:r>
+              <a:rPr lang="en-US" sz="1300" b="1" dirty="0">
+                <a:solidFill>
+                  <a:srgbClr val="1B1B1B"/>
+                </a:solidFill>
+              </a:rPr>
+              <a:t>Sync mechanism</a:t>
+            </a:r>
+            <a:endParaRPr lang="en-US" sz="1300" dirty="0"/>
+          </a:p>
+        </p:txBody>
+      </p:sp>
+      <p:sp>
+        <p:nvSpPr>
+          <p:cNvPr id="22" name="Text 20"/>
+          <p:cNvSpPr/>
+          <p:nvPr/>
+        </p:nvSpPr>
+        <p:spPr>
+          <a:xfrm>
+            <a:off x="5669280" y="3950208"/>
+            <a:ext cx="2926080" cy="420624"/>
+          </a:xfrm>
+          <a:prstGeom prst="rect">
+            <a:avLst/>
+          </a:prstGeom>
+          <a:noFill/>
+          <a:ln/>
+        </p:spPr>
+        <p:txBody>
+          <a:bodyPr wrap="square" rtlCol="0" anchor="ctr"/>
+          <a:lstStyle/>
+          <a:p>
+            <a:pPr algn="ctr" indent="0" marL="0">
+              <a:buNone/>
+            </a:pPr>
+            <a:r>
+              <a:rPr lang="en-US" sz="1200" dirty="0">
+                <a:solidFill>
+                  <a:srgbClr val="C62828"/>
+                </a:solidFill>
+              </a:rPr>
+              <a:t>Progress bar animation only</a:t>
+            </a:r>
+            <a:endParaRPr lang="en-US" sz="1200" dirty="0"/>
+          </a:p>
+        </p:txBody>
+      </p:sp>
+      <p:sp>
+        <p:nvSpPr>
+          <p:cNvPr id="23" name="Text 21"/>
+          <p:cNvSpPr/>
+          <p:nvPr/>
+        </p:nvSpPr>
+        <p:spPr>
+          <a:xfrm>
+            <a:off x="8595360" y="3950208"/>
+            <a:ext cx="2926080" cy="420624"/>
+          </a:xfrm>
+          <a:prstGeom prst="rect">
+            <a:avLst/>
+          </a:prstGeom>
+          <a:noFill/>
+          <a:ln/>
+        </p:spPr>
+        <p:txBody>
+          <a:bodyPr wrap="square" rtlCol="0" anchor="ctr"/>
+          <a:lstStyle/>
+          <a:p>
+            <a:pPr algn="ctr" indent="0" marL="0">
+              <a:buNone/>
+            </a:pPr>
+            <a:r>
+              <a:rPr lang="en-US" sz="1200" b="1" dirty="0">
+                <a:solidFill>
+                  <a:srgbClr val="2E7D32"/>
+                </a:solidFill>
+              </a:rPr>
+              <a:t>Real internet lookup (Wikipedia API) on sync</a:t>
+            </a:r>
+            <a:endParaRPr lang="en-US" sz="1200" dirty="0"/>
+          </a:p>
+        </p:txBody>
+      </p:sp>
+      <p:sp>
+        <p:nvSpPr>
+          <p:cNvPr id="24" name="Shape 22"/>
+          <p:cNvSpPr/>
+          <p:nvPr/>
+        </p:nvSpPr>
+        <p:spPr>
+          <a:xfrm>
+            <a:off x="457200" y="4462272"/>
+            <a:ext cx="11247120" cy="530352"/>
+          </a:xfrm>
+          <a:prstGeom prst="rect">
+            <a:avLst/>
+          </a:prstGeom>
+          <a:solidFill>
+            <a:srgbClr val="F5F5F5"/>
+          </a:solidFill>
+          <a:ln/>
+        </p:spPr>
+      </p:sp>
+      <p:sp>
+        <p:nvSpPr>
+          <p:cNvPr id="25" name="Text 23"/>
+          <p:cNvSpPr/>
+          <p:nvPr/>
+        </p:nvSpPr>
+        <p:spPr>
+          <a:xfrm>
+            <a:off x="640080" y="4517136"/>
+            <a:ext cx="5029200" cy="420624"/>
+          </a:xfrm>
+          <a:prstGeom prst="rect">
+            <a:avLst/>
+          </a:prstGeom>
+          <a:noFill/>
+          <a:ln/>
+        </p:spPr>
+        <p:txBody>
+          <a:bodyPr wrap="square" rtlCol="0" anchor="ctr"/>
+          <a:lstStyle/>
+          <a:p>
+            <a:pPr indent="0" marL="0">
+              <a:buNone/>
+            </a:pPr>
+            <a:r>
+              <a:rPr lang="en-US" sz="1300" b="1" dirty="0">
+                <a:solidFill>
+                  <a:srgbClr val="1B1B1B"/>
+                </a:solidFill>
+              </a:rPr>
+              <a:t>Content uploads</a:t>
+            </a:r>
+            <a:endParaRPr lang="en-US" sz="1300" dirty="0"/>
+          </a:p>
+        </p:txBody>
+      </p:sp>
+      <p:sp>
+        <p:nvSpPr>
+          <p:cNvPr id="26" name="Text 24"/>
+          <p:cNvSpPr/>
+          <p:nvPr/>
+        </p:nvSpPr>
+        <p:spPr>
+          <a:xfrm>
+            <a:off x="5669280" y="4517136"/>
+            <a:ext cx="2926080" cy="420624"/>
+          </a:xfrm>
+          <a:prstGeom prst="rect">
+            <a:avLst/>
+          </a:prstGeom>
+          <a:noFill/>
+          <a:ln/>
+        </p:spPr>
+        <p:txBody>
+          <a:bodyPr wrap="square" rtlCol="0" anchor="ctr"/>
+          <a:lstStyle/>
+          <a:p>
+            <a:pPr algn="ctr" indent="0" marL="0">
+              <a:buNone/>
+            </a:pPr>
+            <a:r>
+              <a:rPr lang="en-US" sz="1200" dirty="0">
+                <a:solidFill>
+                  <a:srgbClr val="C62828"/>
+                </a:solidFill>
+              </a:rPr>
+              <a:t>Not possible</a:t>
+            </a:r>
+            <a:endParaRPr lang="en-US" sz="1200" dirty="0"/>
+          </a:p>
+        </p:txBody>
+      </p:sp>
+      <p:sp>
+        <p:nvSpPr>
+          <p:cNvPr id="27" name="Text 25"/>
+          <p:cNvSpPr/>
+          <p:nvPr/>
+        </p:nvSpPr>
+        <p:spPr>
+          <a:xfrm>
+            <a:off x="8595360" y="4517136"/>
+            <a:ext cx="2926080" cy="420624"/>
+          </a:xfrm>
+          <a:prstGeom prst="rect">
+            <a:avLst/>
+          </a:prstGeom>
+          <a:noFill/>
+          <a:ln/>
+        </p:spPr>
+        <p:txBody>
+          <a:bodyPr wrap="square" rtlCol="0" anchor="ctr"/>
+          <a:lstStyle/>
+          <a:p>
+            <a:pPr algn="ctr" indent="0" marL="0">
+              <a:buNone/>
+            </a:pPr>
+            <a:r>
+              <a:rPr lang="en-US" sz="1200" b="1" dirty="0">
+                <a:solidFill>
+                  <a:srgbClr val="2E7D32"/>
+                </a:solidFill>
+              </a:rPr>
+              <a:t>Real video + PDF past-paper uploads, live</a:t>
+            </a:r>
+            <a:endParaRPr lang="en-US" sz="1200" dirty="0"/>
+          </a:p>
+        </p:txBody>
+      </p:sp>
+      <p:sp>
+        <p:nvSpPr>
+          <p:cNvPr id="28" name="Shape 26"/>
+          <p:cNvSpPr/>
+          <p:nvPr/>
+        </p:nvSpPr>
+        <p:spPr>
+          <a:xfrm>
+            <a:off x="457200" y="5029200"/>
+            <a:ext cx="11247120" cy="530352"/>
+          </a:xfrm>
+          <a:prstGeom prst="rect">
+            <a:avLst/>
+          </a:prstGeom>
+          <a:solidFill>
+            <a:srgbClr val="FFFFFF"/>
+          </a:solidFill>
+          <a:ln/>
+        </p:spPr>
+      </p:sp>
+      <p:sp>
+        <p:nvSpPr>
+          <p:cNvPr id="29" name="Text 27"/>
+          <p:cNvSpPr/>
+          <p:nvPr/>
+        </p:nvSpPr>
+        <p:spPr>
+          <a:xfrm>
+            <a:off x="640080" y="5084064"/>
+            <a:ext cx="5029200" cy="420624"/>
+          </a:xfrm>
+          <a:prstGeom prst="rect">
+            <a:avLst/>
+          </a:prstGeom>
+          <a:noFill/>
+          <a:ln/>
+        </p:spPr>
+        <p:txBody>
+          <a:bodyPr wrap="square" rtlCol="0" anchor="ctr"/>
+          <a:lstStyle/>
+          <a:p>
+            <a:pPr indent="0" marL="0">
+              <a:buNone/>
+            </a:pPr>
+            <a:r>
+              <a:rPr lang="en-US" sz="1300" b="1" dirty="0">
+                <a:solidFill>
+                  <a:srgbClr val="1B1B1B"/>
+                </a:solidFill>
+              </a:rPr>
+              <a:t>Data persistence</a:t>
+            </a:r>
+            <a:endParaRPr lang="en-US" sz="1300" dirty="0"/>
+          </a:p>
+        </p:txBody>
+      </p:sp>
+      <p:sp>
+        <p:nvSpPr>
+          <p:cNvPr id="30" name="Text 28"/>
+          <p:cNvSpPr/>
+          <p:nvPr/>
+        </p:nvSpPr>
+        <p:spPr>
+          <a:xfrm>
+            <a:off x="5669280" y="5084064"/>
+            <a:ext cx="2926080" cy="420624"/>
+          </a:xfrm>
+          <a:prstGeom prst="rect">
+            <a:avLst/>
+          </a:prstGeom>
+          <a:noFill/>
+          <a:ln/>
+        </p:spPr>
+        <p:txBody>
+          <a:bodyPr wrap="square" rtlCol="0" anchor="ctr"/>
+          <a:lstStyle/>
+          <a:p>
+            <a:pPr algn="ctr" indent="0" marL="0">
+              <a:buNone/>
+            </a:pPr>
+            <a:r>
+              <a:rPr lang="en-US" sz="1200" dirty="0">
+                <a:solidFill>
+                  <a:srgbClr val="C62828"/>
+                </a:solidFill>
+              </a:rPr>
+              <a:t>Lost on refresh</a:t>
+            </a:r>
+            <a:endParaRPr lang="en-US" sz="1200" dirty="0"/>
+          </a:p>
+        </p:txBody>
+      </p:sp>
+      <p:sp>
+        <p:nvSpPr>
+          <p:cNvPr id="31" name="Text 29"/>
+          <p:cNvSpPr/>
+          <p:nvPr/>
+        </p:nvSpPr>
+        <p:spPr>
+          <a:xfrm>
+            <a:off x="8595360" y="5084064"/>
+            <a:ext cx="2926080" cy="420624"/>
+          </a:xfrm>
+          <a:prstGeom prst="rect">
+            <a:avLst/>
+          </a:prstGeom>
+          <a:noFill/>
+          <a:ln/>
+        </p:spPr>
+        <p:txBody>
+          <a:bodyPr wrap="square" rtlCol="0" anchor="ctr"/>
+          <a:lstStyle/>
+          <a:p>
+            <a:pPr algn="ctr" indent="0" marL="0">
+              <a:buNone/>
+            </a:pPr>
+            <a:r>
+              <a:rPr lang="en-US" sz="1200" b="1" dirty="0">
+                <a:solidFill>
+                  <a:srgbClr val="2E7D32"/>
+                </a:solidFill>
+              </a:rPr>
+              <a:t>Survives restarts, shared across devices</a:t>
+            </a:r>
+            <a:endParaRPr lang="en-US" sz="1200" dirty="0"/>
+          </a:p>
+        </p:txBody>
+      </p:sp>
+    </p:spTree>
+  </p:cSld>
+  <p:clrMapOvr>
+    <a:masterClrMapping/>
+  </p:clrMapOvr>
+</p:sld>
+</file>
+
+<file path=ppt/slides/slide5.xml><?xml version="1.0" encoding="utf-8"?>
+<p:sld xmlns:a="http://schemas.openxmlformats.org/drawingml/2006/main" xmlns:r="http://schemas.openxmlformats.org/officeDocument/2006/relationships" xmlns:p="http://schemas.openxmlformats.org/presentationml/2006/main">
+  <p:cSld name="Slide 5">
     <p:bg>
       <p:bgPr>
         <a:solidFill>
@@ -2884,8 +3724,8 @@
         </p:nvSpPr>
         <p:spPr>
           <a:xfrm>
-            <a:off x="457200" y="457200"/>
-            <a:ext cx="8229600" cy="640080"/>
+            <a:off x="457200" y="365760"/>
+            <a:ext cx="11247120" cy="731520"/>
           </a:xfrm>
           <a:prstGeom prst="rect">
             <a:avLst/>
@@ -2901,7 +3741,7 @@
               <a:buNone/>
             </a:pPr>
             <a:r>
-              <a:rPr lang="en-US" sz="4000" b="1" dirty="0">
+              <a:rPr lang="en-US" sz="3400" b="1" dirty="0">
                 <a:solidFill>
                   <a:srgbClr val="B85042"/>
                 </a:solidFill>
@@ -2909,9 +3749,9 @@
                 <a:ea typeface="Georgia" pitchFamily="34" charset="-122"/>
                 <a:cs typeface="Georgia" pitchFamily="34" charset="-120"/>
               </a:rPr>
-              <a:t>HOW IT WORKS: Technical Architecture</a:t>
-            </a:r>
-            <a:endParaRPr lang="en-US" sz="4000" dirty="0"/>
+              <a:t>HOW IT WORKS: The Sync-and-Learn Loop</a:t>
+            </a:r>
+            <a:endParaRPr lang="en-US" sz="3400" dirty="0"/>
           </a:p>
         </p:txBody>
       </p:sp>
@@ -2923,8 +3763,8 @@
         </p:nvSpPr>
         <p:spPr>
           <a:xfrm>
-            <a:off x="640080" y="1371600"/>
-            <a:ext cx="7863840" cy="822960"/>
+            <a:off x="457200" y="1554480"/>
+            <a:ext cx="2697480" cy="4297680"/>
           </a:xfrm>
           <a:prstGeom prst="rect">
             <a:avLst/>
@@ -2932,7 +3772,7 @@
           <a:solidFill>
             <a:srgbClr val="FFFFFF"/>
           </a:solidFill>
-          <a:ln w="38100">
+          <a:ln w="25400">
             <a:solidFill>
               <a:srgbClr val="2E7D32"/>
             </a:solidFill>
@@ -2948,8 +3788,8 @@
         </p:nvSpPr>
         <p:spPr>
           <a:xfrm>
-            <a:off x="822960" y="1463040"/>
-            <a:ext cx="640080" cy="640080"/>
+            <a:off x="1417320" y="1783080"/>
+            <a:ext cx="777240" cy="777240"/>
           </a:xfrm>
           <a:prstGeom prst="ellipse">
             <a:avLst/>
@@ -2968,8 +3808,8 @@
         </p:nvSpPr>
         <p:spPr>
           <a:xfrm>
-            <a:off x="822960" y="1463040"/>
-            <a:ext cx="640080" cy="640080"/>
+            <a:off x="1417320" y="1783080"/>
+            <a:ext cx="777240" cy="777240"/>
           </a:xfrm>
           <a:prstGeom prst="rect">
             <a:avLst/>
@@ -3007,34 +3847,31 @@
         </p:nvSpPr>
         <p:spPr>
           <a:xfrm>
-            <a:off x="1645920" y="1463040"/>
-            <a:ext cx="2743200" cy="320040"/>
-          </a:xfrm>
-          <a:prstGeom prst="rect">
-            <a:avLst/>
-          </a:prstGeom>
-          <a:noFill/>
-          <a:ln/>
-        </p:spPr>
-        <p:txBody>
-          <a:bodyPr wrap="square" rtlCol="0" anchor="ctr"/>
-          <a:lstStyle/>
-          <a:p>
-            <a:pPr indent="0" marL="0">
-              <a:buNone/>
-            </a:pPr>
-            <a:r>
-              <a:rPr lang="en-US" sz="1800" b="1" dirty="0">
+            <a:off x="640080" y="2743200"/>
+            <a:ext cx="2331720" cy="1005840"/>
+          </a:xfrm>
+          <a:prstGeom prst="rect">
+            <a:avLst/>
+          </a:prstGeom>
+          <a:noFill/>
+          <a:ln/>
+        </p:spPr>
+        <p:txBody>
+          <a:bodyPr wrap="square" rtlCol="0" anchor="ctr"/>
+          <a:lstStyle/>
+          <a:p>
+            <a:pPr algn="ctr" indent="0" marL="0">
+              <a:buNone/>
+            </a:pPr>
+            <a:r>
+              <a:rPr lang="en-US" sz="1500" b="1" dirty="0">
                 <a:solidFill>
                   <a:srgbClr val="1B1B1B"/>
                 </a:solidFill>
-                <a:latin typeface="Trebuchet MS" pitchFamily="34" charset="0"/>
-                <a:ea typeface="Trebuchet MS" pitchFamily="34" charset="-122"/>
-                <a:cs typeface="Trebuchet MS" pitchFamily="34" charset="-120"/>
-              </a:rPr>
-              <a:t>Rural School</a:t>
-            </a:r>
-            <a:endParaRPr lang="en-US" sz="1800" dirty="0"/>
+              </a:rPr>
+              <a:t>Student asks a question offline</a:t>
+            </a:r>
+            <a:endParaRPr lang="en-US" sz="1500" dirty="0"/>
           </a:p>
         </p:txBody>
       </p:sp>
@@ -3046,51 +3883,31 @@
         </p:nvSpPr>
         <p:spPr>
           <a:xfrm>
-            <a:off x="1645920" y="1783080"/>
-            <a:ext cx="2743200" cy="365760"/>
-          </a:xfrm>
-          <a:prstGeom prst="rect">
-            <a:avLst/>
-          </a:prstGeom>
-          <a:noFill/>
-          <a:ln/>
-        </p:spPr>
-        <p:txBody>
-          <a:bodyPr wrap="square" rtlCol="0" anchor="ctr"/>
-          <a:lstStyle/>
-          <a:p>
-            <a:pPr indent="0" marL="0">
-              <a:buNone/>
-            </a:pPr>
-            <a:r>
-              <a:rPr lang="en-US" sz="1300" dirty="0">
-                <a:solidFill>
-                  <a:srgbClr val="616161"/>
-                </a:solidFill>
-                <a:latin typeface="Calibri" pitchFamily="34" charset="0"/>
-                <a:ea typeface="Calibri" pitchFamily="34" charset="-122"/>
-                <a:cs typeface="Calibri" pitchFamily="34" charset="-120"/>
-              </a:rPr>
-              <a:t>Raspberry Pi Village Hub</a:t>
-            </a:r>
-            <a:endParaRPr lang="en-US" sz="1300" dirty="0"/>
-          </a:p>
-          <a:p>
-            <a:pPr indent="0" marL="0">
-              <a:buNone/>
-            </a:pPr>
-            <a:r>
-              <a:rPr lang="en-US" sz="1300" dirty="0">
-                <a:solidFill>
-                  <a:srgbClr val="616161"/>
-                </a:solidFill>
-                <a:latin typeface="Calibri" pitchFamily="34" charset="0"/>
-                <a:ea typeface="Calibri" pitchFamily="34" charset="-122"/>
-                <a:cs typeface="Calibri" pitchFamily="34" charset="-120"/>
-              </a:rPr>
-              <a:t>(Local Wi-Fi Hotspot)</a:t>
-            </a:r>
-            <a:endParaRPr lang="en-US" sz="1300" dirty="0"/>
+            <a:off x="640080" y="3794760"/>
+            <a:ext cx="2331720" cy="1828800"/>
+          </a:xfrm>
+          <a:prstGeom prst="rect">
+            <a:avLst/>
+          </a:prstGeom>
+          <a:noFill/>
+          <a:ln/>
+        </p:spPr>
+        <p:txBody>
+          <a:bodyPr wrap="square" rtlCol="0" anchor="ctr"/>
+          <a:lstStyle/>
+          <a:p>
+            <a:pPr algn="ctr" indent="0" marL="0">
+              <a:buNone/>
+            </a:pPr>
+            <a:r>
+              <a:rPr lang="en-US" sz="1200" dirty="0">
+                <a:solidFill>
+                  <a:srgbClr val="424242"/>
+                </a:solidFill>
+              </a:rPr>
+              <a:t>AI Tutor checks its local knowledge base first — zero data cost, instant if known.</a:t>
+            </a:r>
+            <a:endParaRPr lang="en-US" sz="1200" dirty="0"/>
           </a:p>
         </p:txBody>
       </p:sp>
@@ -3102,28 +3919,8 @@
         </p:nvSpPr>
         <p:spPr>
           <a:xfrm>
-            <a:off x="4297680" y="2286000"/>
-            <a:ext cx="548640" cy="457200"/>
-          </a:xfrm>
-          <a:prstGeom prst="downArrow">
-            <a:avLst/>
-          </a:prstGeom>
-          <a:solidFill>
-            <a:srgbClr val="FDD835"/>
-          </a:solidFill>
-          <a:ln/>
-        </p:spPr>
-      </p:sp>
-      <p:sp>
-        <p:nvSpPr>
-          <p:cNvPr id="9" name="Shape 7"/>
-          <p:cNvSpPr/>
-          <p:nvPr/>
-        </p:nvSpPr>
-        <p:spPr>
-          <a:xfrm>
-            <a:off x="640080" y="2468880"/>
-            <a:ext cx="7863840" cy="822960"/>
+            <a:off x="3337560" y="1554480"/>
+            <a:ext cx="2697480" cy="4297680"/>
           </a:xfrm>
           <a:prstGeom prst="rect">
             <a:avLst/>
@@ -3131,7 +3928,7 @@
           <a:solidFill>
             <a:srgbClr val="FFFFFF"/>
           </a:solidFill>
-          <a:ln w="38100">
+          <a:ln w="25400">
             <a:solidFill>
               <a:srgbClr val="2E7D32"/>
             </a:solidFill>
@@ -3141,14 +3938,14 @@
       </p:sp>
       <p:sp>
         <p:nvSpPr>
-          <p:cNvPr id="10" name="Shape 8"/>
-          <p:cNvSpPr/>
-          <p:nvPr/>
-        </p:nvSpPr>
-        <p:spPr>
-          <a:xfrm>
-            <a:off x="822960" y="2560320"/>
-            <a:ext cx="640080" cy="640080"/>
+          <p:cNvPr id="9" name="Shape 7"/>
+          <p:cNvSpPr/>
+          <p:nvPr/>
+        </p:nvSpPr>
+        <p:spPr>
+          <a:xfrm>
+            <a:off x="4297680" y="1783080"/>
+            <a:ext cx="777240" cy="777240"/>
           </a:xfrm>
           <a:prstGeom prst="ellipse">
             <a:avLst/>
@@ -3161,14 +3958,14 @@
       </p:sp>
       <p:sp>
         <p:nvSpPr>
-          <p:cNvPr id="11" name="Text 9"/>
-          <p:cNvSpPr/>
-          <p:nvPr/>
-        </p:nvSpPr>
-        <p:spPr>
-          <a:xfrm>
-            <a:off x="822960" y="2560320"/>
-            <a:ext cx="640080" cy="640080"/>
+          <p:cNvPr id="10" name="Text 8"/>
+          <p:cNvSpPr/>
+          <p:nvPr/>
+        </p:nvSpPr>
+        <p:spPr>
+          <a:xfrm>
+            <a:off x="4297680" y="1783080"/>
+            <a:ext cx="777240" cy="777240"/>
           </a:xfrm>
           <a:prstGeom prst="rect">
             <a:avLst/>
@@ -3200,129 +3997,86 @@
       </p:sp>
       <p:sp>
         <p:nvSpPr>
+          <p:cNvPr id="11" name="Text 9"/>
+          <p:cNvSpPr/>
+          <p:nvPr/>
+        </p:nvSpPr>
+        <p:spPr>
+          <a:xfrm>
+            <a:off x="3520440" y="2743200"/>
+            <a:ext cx="2331720" cy="1005840"/>
+          </a:xfrm>
+          <a:prstGeom prst="rect">
+            <a:avLst/>
+          </a:prstGeom>
+          <a:noFill/>
+          <a:ln/>
+        </p:spPr>
+        <p:txBody>
+          <a:bodyPr wrap="square" rtlCol="0" anchor="ctr"/>
+          <a:lstStyle/>
+          <a:p>
+            <a:pPr algn="ctr" indent="0" marL="0">
+              <a:buNone/>
+            </a:pPr>
+            <a:r>
+              <a:rPr lang="en-US" sz="1500" b="1" dirty="0">
+                <a:solidFill>
+                  <a:srgbClr val="1B1B1B"/>
+                </a:solidFill>
+              </a:rPr>
+              <a:t>Unknown question? Honestly flagged</a:t>
+            </a:r>
+            <a:endParaRPr lang="en-US" sz="1500" dirty="0"/>
+          </a:p>
+        </p:txBody>
+      </p:sp>
+      <p:sp>
+        <p:nvSpPr>
           <p:cNvPr id="12" name="Text 10"/>
           <p:cNvSpPr/>
           <p:nvPr/>
         </p:nvSpPr>
         <p:spPr>
           <a:xfrm>
-            <a:off x="1645920" y="2560320"/>
-            <a:ext cx="2743200" cy="320040"/>
-          </a:xfrm>
-          <a:prstGeom prst="rect">
-            <a:avLst/>
-          </a:prstGeom>
-          <a:noFill/>
-          <a:ln/>
-        </p:spPr>
-        <p:txBody>
-          <a:bodyPr wrap="square" rtlCol="0" anchor="ctr"/>
-          <a:lstStyle/>
-          <a:p>
-            <a:pPr indent="0" marL="0">
-              <a:buNone/>
-            </a:pPr>
-            <a:r>
-              <a:rPr lang="en-US" sz="1800" b="1" dirty="0">
-                <a:solidFill>
-                  <a:srgbClr val="1B1B1B"/>
-                </a:solidFill>
-                <a:latin typeface="Trebuchet MS" pitchFamily="34" charset="0"/>
-                <a:ea typeface="Trebuchet MS" pitchFamily="34" charset="-122"/>
-                <a:cs typeface="Trebuchet MS" pitchFamily="34" charset="-120"/>
-              </a:rPr>
-              <a:t>Teacher Travels</a:t>
-            </a:r>
-            <a:endParaRPr lang="en-US" sz="1800" dirty="0"/>
-          </a:p>
-        </p:txBody>
-      </p:sp>
-      <p:sp>
-        <p:nvSpPr>
-          <p:cNvPr id="13" name="Text 11"/>
-          <p:cNvSpPr/>
-          <p:nvPr/>
-        </p:nvSpPr>
-        <p:spPr>
-          <a:xfrm>
-            <a:off x="1645920" y="2880360"/>
-            <a:ext cx="2743200" cy="365760"/>
-          </a:xfrm>
-          <a:prstGeom prst="rect">
-            <a:avLst/>
-          </a:prstGeom>
-          <a:noFill/>
-          <a:ln/>
-        </p:spPr>
-        <p:txBody>
-          <a:bodyPr wrap="square" rtlCol="0" anchor="ctr"/>
-          <a:lstStyle/>
-          <a:p>
-            <a:pPr indent="0" marL="0">
-              <a:buNone/>
-            </a:pPr>
-            <a:r>
-              <a:rPr lang="en-US" sz="1300" dirty="0">
-                <a:solidFill>
-                  <a:srgbClr val="616161"/>
-                </a:solidFill>
-                <a:latin typeface="Calibri" pitchFamily="34" charset="0"/>
-                <a:ea typeface="Calibri" pitchFamily="34" charset="-122"/>
-                <a:cs typeface="Calibri" pitchFamily="34" charset="-120"/>
-              </a:rPr>
-              <a:t>Phone downloads updates</a:t>
-            </a:r>
-            <a:endParaRPr lang="en-US" sz="1300" dirty="0"/>
-          </a:p>
-          <a:p>
-            <a:pPr indent="0" marL="0">
-              <a:buNone/>
-            </a:pPr>
-            <a:r>
-              <a:rPr lang="en-US" sz="1300" dirty="0">
-                <a:solidFill>
-                  <a:srgbClr val="616161"/>
-                </a:solidFill>
-                <a:latin typeface="Calibri" pitchFamily="34" charset="0"/>
-                <a:ea typeface="Calibri" pitchFamily="34" charset="-122"/>
-                <a:cs typeface="Calibri" pitchFamily="34" charset="-120"/>
-              </a:rPr>
-              <a:t>in urban area</a:t>
-            </a:r>
-            <a:endParaRPr lang="en-US" sz="1300" dirty="0"/>
-          </a:p>
-        </p:txBody>
-      </p:sp>
-      <p:sp>
-        <p:nvSpPr>
-          <p:cNvPr id="14" name="Shape 12"/>
-          <p:cNvSpPr/>
-          <p:nvPr/>
-        </p:nvSpPr>
-        <p:spPr>
-          <a:xfrm>
-            <a:off x="4297680" y="3383280"/>
-            <a:ext cx="548640" cy="457200"/>
-          </a:xfrm>
-          <a:prstGeom prst="downArrow">
-            <a:avLst/>
-          </a:prstGeom>
-          <a:solidFill>
-            <a:srgbClr val="FDD835"/>
-          </a:solidFill>
-          <a:ln/>
-        </p:spPr>
-      </p:sp>
-      <p:sp>
-        <p:nvSpPr>
-          <p:cNvPr id="15" name="Shape 13"/>
-          <p:cNvSpPr/>
-          <p:nvPr/>
-        </p:nvSpPr>
-        <p:spPr>
-          <a:xfrm>
-            <a:off x="640080" y="3566160"/>
-            <a:ext cx="7863840" cy="822960"/>
+            <a:off x="3520440" y="3794760"/>
+            <a:ext cx="2331720" cy="1828800"/>
+          </a:xfrm>
+          <a:prstGeom prst="rect">
+            <a:avLst/>
+          </a:prstGeom>
+          <a:noFill/>
+          <a:ln/>
+        </p:spPr>
+        <p:txBody>
+          <a:bodyPr wrap="square" rtlCol="0" anchor="ctr"/>
+          <a:lstStyle/>
+          <a:p>
+            <a:pPr algn="ctr" indent="0" marL="0">
+              <a:buNone/>
+            </a:pPr>
+            <a:r>
+              <a:rPr lang="en-US" sz="1200" dirty="0">
+                <a:solidFill>
+                  <a:srgbClr val="424242"/>
+                </a:solidFill>
+              </a:rPr>
+              <a:t>Not guessed. Queued permanently, with a clear "I don't know this yet" message.</a:t>
+            </a:r>
+            <a:endParaRPr lang="en-US" sz="1200" dirty="0"/>
+          </a:p>
+        </p:txBody>
+      </p:sp>
+      <p:sp>
+        <p:nvSpPr>
+          <p:cNvPr id="13" name="Shape 11"/>
+          <p:cNvSpPr/>
+          <p:nvPr/>
+        </p:nvSpPr>
+        <p:spPr>
+          <a:xfrm>
+            <a:off x="6217920" y="1554480"/>
+            <a:ext cx="2697480" cy="4297680"/>
           </a:xfrm>
           <a:prstGeom prst="rect">
             <a:avLst/>
@@ -3330,7 +4084,7 @@
           <a:solidFill>
             <a:srgbClr val="FFFFFF"/>
           </a:solidFill>
-          <a:ln w="38100">
+          <a:ln w="25400">
             <a:solidFill>
               <a:srgbClr val="2E7D32"/>
             </a:solidFill>
@@ -3340,14 +4094,14 @@
       </p:sp>
       <p:sp>
         <p:nvSpPr>
-          <p:cNvPr id="16" name="Shape 14"/>
-          <p:cNvSpPr/>
-          <p:nvPr/>
-        </p:nvSpPr>
-        <p:spPr>
-          <a:xfrm>
-            <a:off x="822960" y="3657600"/>
-            <a:ext cx="640080" cy="640080"/>
+          <p:cNvPr id="14" name="Shape 12"/>
+          <p:cNvSpPr/>
+          <p:nvPr/>
+        </p:nvSpPr>
+        <p:spPr>
+          <a:xfrm>
+            <a:off x="7178040" y="1783080"/>
+            <a:ext cx="777240" cy="777240"/>
           </a:xfrm>
           <a:prstGeom prst="ellipse">
             <a:avLst/>
@@ -3360,14 +4114,14 @@
       </p:sp>
       <p:sp>
         <p:nvSpPr>
-          <p:cNvPr id="17" name="Text 15"/>
-          <p:cNvSpPr/>
-          <p:nvPr/>
-        </p:nvSpPr>
-        <p:spPr>
-          <a:xfrm>
-            <a:off x="822960" y="3657600"/>
-            <a:ext cx="640080" cy="640080"/>
+          <p:cNvPr id="15" name="Text 13"/>
+          <p:cNvSpPr/>
+          <p:nvPr/>
+        </p:nvSpPr>
+        <p:spPr>
+          <a:xfrm>
+            <a:off x="7178040" y="1783080"/>
+            <a:ext cx="777240" cy="777240"/>
           </a:xfrm>
           <a:prstGeom prst="rect">
             <a:avLst/>
@@ -3399,119 +4153,96 @@
       </p:sp>
       <p:sp>
         <p:nvSpPr>
-          <p:cNvPr id="18" name="Text 16"/>
-          <p:cNvSpPr/>
-          <p:nvPr/>
-        </p:nvSpPr>
-        <p:spPr>
-          <a:xfrm>
-            <a:off x="1645920" y="3657600"/>
-            <a:ext cx="2743200" cy="320040"/>
-          </a:xfrm>
-          <a:prstGeom prst="rect">
-            <a:avLst/>
-          </a:prstGeom>
-          <a:noFill/>
-          <a:ln/>
-        </p:spPr>
-        <p:txBody>
-          <a:bodyPr wrap="square" rtlCol="0" anchor="ctr"/>
-          <a:lstStyle/>
-          <a:p>
-            <a:pPr indent="0" marL="0">
-              <a:buNone/>
-            </a:pPr>
-            <a:r>
-              <a:rPr lang="en-US" sz="1800" b="1" dirty="0">
+          <p:cNvPr id="16" name="Text 14"/>
+          <p:cNvSpPr/>
+          <p:nvPr/>
+        </p:nvSpPr>
+        <p:spPr>
+          <a:xfrm>
+            <a:off x="6400800" y="2743200"/>
+            <a:ext cx="2331720" cy="1005840"/>
+          </a:xfrm>
+          <a:prstGeom prst="rect">
+            <a:avLst/>
+          </a:prstGeom>
+          <a:noFill/>
+          <a:ln/>
+        </p:spPr>
+        <p:txBody>
+          <a:bodyPr wrap="square" rtlCol="0" anchor="ctr"/>
+          <a:lstStyle/>
+          <a:p>
+            <a:pPr algn="ctr" indent="0" marL="0">
+              <a:buNone/>
+            </a:pPr>
+            <a:r>
+              <a:rPr lang="en-US" sz="1500" b="1" dirty="0">
                 <a:solidFill>
                   <a:srgbClr val="1B1B1B"/>
                 </a:solidFill>
-                <a:latin typeface="Trebuchet MS" pitchFamily="34" charset="0"/>
-                <a:ea typeface="Trebuchet MS" pitchFamily="34" charset="-122"/>
-                <a:cs typeface="Trebuchet MS" pitchFamily="34" charset="-120"/>
-              </a:rPr>
-              <a:t>Auto-Sync</a:t>
-            </a:r>
-            <a:endParaRPr lang="en-US" sz="1800" dirty="0"/>
-          </a:p>
-        </p:txBody>
-      </p:sp>
-      <p:sp>
-        <p:nvSpPr>
-          <p:cNvPr id="19" name="Text 17"/>
-          <p:cNvSpPr/>
-          <p:nvPr/>
-        </p:nvSpPr>
-        <p:spPr>
-          <a:xfrm>
-            <a:off x="1645920" y="3977640"/>
-            <a:ext cx="2743200" cy="365760"/>
-          </a:xfrm>
-          <a:prstGeom prst="rect">
-            <a:avLst/>
-          </a:prstGeom>
-          <a:noFill/>
-          <a:ln/>
-        </p:spPr>
-        <p:txBody>
-          <a:bodyPr wrap="square" rtlCol="0" anchor="ctr"/>
-          <a:lstStyle/>
-          <a:p>
-            <a:pPr indent="0" marL="0">
-              <a:buNone/>
-            </a:pPr>
-            <a:r>
-              <a:rPr lang="en-US" sz="1300" dirty="0">
-                <a:solidFill>
-                  <a:srgbClr val="616161"/>
-                </a:solidFill>
-                <a:latin typeface="Calibri" pitchFamily="34" charset="0"/>
-                <a:ea typeface="Calibri" pitchFamily="34" charset="-122"/>
-                <a:cs typeface="Calibri" pitchFamily="34" charset="-120"/>
-              </a:rPr>
-              <a:t>Returns to village</a:t>
-            </a:r>
-            <a:endParaRPr lang="en-US" sz="1300" dirty="0"/>
-          </a:p>
-          <a:p>
-            <a:pPr indent="0" marL="0">
-              <a:buNone/>
-            </a:pPr>
-            <a:r>
-              <a:rPr lang="en-US" sz="1300" dirty="0">
-                <a:solidFill>
-                  <a:srgbClr val="616161"/>
-                </a:solidFill>
-                <a:latin typeface="Calibri" pitchFamily="34" charset="0"/>
-                <a:ea typeface="Calibri" pitchFamily="34" charset="-122"/>
-                <a:cs typeface="Calibri" pitchFamily="34" charset="-120"/>
-              </a:rPr>
-              <a:t>Hub syncs new content</a:t>
-            </a:r>
-            <a:endParaRPr lang="en-US" sz="1300" dirty="0"/>
-          </a:p>
-        </p:txBody>
-      </p:sp>
-      <p:sp>
-        <p:nvSpPr>
-          <p:cNvPr id="20" name="Shape 18"/>
-          <p:cNvSpPr/>
-          <p:nvPr/>
-        </p:nvSpPr>
-        <p:spPr>
-          <a:xfrm>
-            <a:off x="4572000" y="1371600"/>
-            <a:ext cx="3931920" cy="3017520"/>
+              </a:rPr>
+              <a:t>Data Mule Sync runs</a:t>
+            </a:r>
+            <a:endParaRPr lang="en-US" sz="1500" dirty="0"/>
+          </a:p>
+        </p:txBody>
+      </p:sp>
+      <p:sp>
+        <p:nvSpPr>
+          <p:cNvPr id="17" name="Text 15"/>
+          <p:cNvSpPr/>
+          <p:nvPr/>
+        </p:nvSpPr>
+        <p:spPr>
+          <a:xfrm>
+            <a:off x="6400800" y="3794760"/>
+            <a:ext cx="2331720" cy="1828800"/>
+          </a:xfrm>
+          <a:prstGeom prst="rect">
+            <a:avLst/>
+          </a:prstGeom>
+          <a:noFill/>
+          <a:ln/>
+        </p:spPr>
+        <p:txBody>
+          <a:bodyPr wrap="square" rtlCol="0" anchor="ctr"/>
+          <a:lstStyle/>
+          <a:p>
+            <a:pPr algn="ctr" indent="0" marL="0">
+              <a:buNone/>
+            </a:pPr>
+            <a:r>
+              <a:rPr lang="en-US" sz="1200" dirty="0">
+                <a:solidFill>
+                  <a:srgbClr val="424242"/>
+                </a:solidFill>
+              </a:rPr>
+              <a:t>Teacher's phone or USB drive in town performs a real internet lookup for queued questions.</a:t>
+            </a:r>
+            <a:endParaRPr lang="en-US" sz="1200" dirty="0"/>
+          </a:p>
+        </p:txBody>
+      </p:sp>
+      <p:sp>
+        <p:nvSpPr>
+          <p:cNvPr id="18" name="Shape 16"/>
+          <p:cNvSpPr/>
+          <p:nvPr/>
+        </p:nvSpPr>
+        <p:spPr>
+          <a:xfrm>
+            <a:off x="9098280" y="1554480"/>
+            <a:ext cx="2697480" cy="4297680"/>
           </a:xfrm>
           <a:prstGeom prst="rect">
             <a:avLst/>
           </a:prstGeom>
           <a:solidFill>
-            <a:srgbClr val="E3F2FD"/>
+            <a:srgbClr val="FFFFFF"/>
           </a:solidFill>
           <a:ln w="25400">
             <a:solidFill>
-              <a:srgbClr val="1976D2"/>
+              <a:srgbClr val="2E7D32"/>
             </a:solidFill>
             <a:prstDash val="solid"/>
           </a:ln>
@@ -3519,40 +4250,96 @@
       </p:sp>
       <p:sp>
         <p:nvSpPr>
+          <p:cNvPr id="19" name="Shape 17"/>
+          <p:cNvSpPr/>
+          <p:nvPr/>
+        </p:nvSpPr>
+        <p:spPr>
+          <a:xfrm>
+            <a:off x="10058400" y="1783080"/>
+            <a:ext cx="777240" cy="777240"/>
+          </a:xfrm>
+          <a:prstGeom prst="ellipse">
+            <a:avLst/>
+          </a:prstGeom>
+          <a:solidFill>
+            <a:srgbClr val="FDD835"/>
+          </a:solidFill>
+          <a:ln/>
+        </p:spPr>
+      </p:sp>
+      <p:sp>
+        <p:nvSpPr>
+          <p:cNvPr id="20" name="Text 18"/>
+          <p:cNvSpPr/>
+          <p:nvPr/>
+        </p:nvSpPr>
+        <p:spPr>
+          <a:xfrm>
+            <a:off x="10058400" y="1783080"/>
+            <a:ext cx="777240" cy="777240"/>
+          </a:xfrm>
+          <a:prstGeom prst="rect">
+            <a:avLst/>
+          </a:prstGeom>
+          <a:noFill/>
+          <a:ln/>
+        </p:spPr>
+        <p:txBody>
+          <a:bodyPr wrap="square" rtlCol="0" anchor="ctr"/>
+          <a:lstStyle/>
+          <a:p>
+            <a:pPr algn="ctr" indent="0" marL="0">
+              <a:buNone/>
+            </a:pPr>
+            <a:r>
+              <a:rPr lang="en-US" sz="2800" b="1" dirty="0">
+                <a:solidFill>
+                  <a:srgbClr val="1B1B1B"/>
+                </a:solidFill>
+                <a:latin typeface="Impact" pitchFamily="34" charset="0"/>
+                <a:ea typeface="Impact" pitchFamily="34" charset="-122"/>
+                <a:cs typeface="Impact" pitchFamily="34" charset="-120"/>
+              </a:rPr>
+              <a:t>4</a:t>
+            </a:r>
+            <a:endParaRPr lang="en-US" sz="2800" dirty="0"/>
+          </a:p>
+        </p:txBody>
+      </p:sp>
+      <p:sp>
+        <p:nvSpPr>
           <p:cNvPr id="21" name="Text 19"/>
           <p:cNvSpPr/>
           <p:nvPr/>
         </p:nvSpPr>
         <p:spPr>
           <a:xfrm>
-            <a:off x="4754880" y="1554480"/>
-            <a:ext cx="3566160" cy="365760"/>
-          </a:xfrm>
-          <a:prstGeom prst="rect">
-            <a:avLst/>
-          </a:prstGeom>
-          <a:noFill/>
-          <a:ln/>
-        </p:spPr>
-        <p:txBody>
-          <a:bodyPr wrap="square" rtlCol="0" anchor="ctr"/>
-          <a:lstStyle/>
-          <a:p>
-            <a:pPr indent="0" marL="0">
-              <a:buNone/>
-            </a:pPr>
-            <a:r>
-              <a:rPr lang="en-US" sz="1800" b="1" dirty="0">
-                <a:solidFill>
-                  <a:srgbClr val="1976D2"/>
-                </a:solidFill>
-                <a:latin typeface="Trebuchet MS" pitchFamily="34" charset="0"/>
-                <a:ea typeface="Trebuchet MS" pitchFamily="34" charset="-122"/>
-                <a:cs typeface="Trebuchet MS" pitchFamily="34" charset="-120"/>
-              </a:rPr>
-              <a:t>Tech Stack</a:t>
-            </a:r>
-            <a:endParaRPr lang="en-US" sz="1800" dirty="0"/>
+            <a:off x="9281160" y="2743200"/>
+            <a:ext cx="2331720" cy="1005840"/>
+          </a:xfrm>
+          <a:prstGeom prst="rect">
+            <a:avLst/>
+          </a:prstGeom>
+          <a:noFill/>
+          <a:ln/>
+        </p:spPr>
+        <p:txBody>
+          <a:bodyPr wrap="square" rtlCol="0" anchor="ctr"/>
+          <a:lstStyle/>
+          <a:p>
+            <a:pPr algn="ctr" indent="0" marL="0">
+              <a:buNone/>
+            </a:pPr>
+            <a:r>
+              <a:rPr lang="en-US" sz="1500" b="1" dirty="0">
+                <a:solidFill>
+                  <a:srgbClr val="1B1B1B"/>
+                </a:solidFill>
+              </a:rPr>
+              <a:t>Answer saved to the Hub — forever</a:t>
+            </a:r>
+            <a:endParaRPr lang="en-US" sz="1500" dirty="0"/>
           </a:p>
         </p:txBody>
       </p:sp>
@@ -3564,227 +4351,29 @@
         </p:nvSpPr>
         <p:spPr>
           <a:xfrm>
-            <a:off x="4754880" y="2011680"/>
-            <a:ext cx="3566160" cy="274320"/>
-          </a:xfrm>
-          <a:prstGeom prst="rect">
-            <a:avLst/>
-          </a:prstGeom>
-          <a:noFill/>
-          <a:ln/>
-        </p:spPr>
-        <p:txBody>
-          <a:bodyPr wrap="square" rtlCol="0" anchor="ctr"/>
-          <a:lstStyle/>
-          <a:p>
-            <a:pPr indent="0" marL="0">
+            <a:off x="9281160" y="3794760"/>
+            <a:ext cx="2331720" cy="1828800"/>
+          </a:xfrm>
+          <a:prstGeom prst="rect">
+            <a:avLst/>
+          </a:prstGeom>
+          <a:noFill/>
+          <a:ln/>
+        </p:spPr>
+        <p:txBody>
+          <a:bodyPr wrap="square" rtlCol="0" anchor="ctr"/>
+          <a:lstStyle/>
+          <a:p>
+            <a:pPr algn="ctr" indent="0" marL="0">
               <a:buNone/>
             </a:pPr>
             <a:r>
               <a:rPr lang="en-US" sz="1200" dirty="0">
                 <a:solidFill>
-                  <a:srgbClr val="1B1B1B"/>
-                </a:solidFill>
-                <a:latin typeface="Calibri" pitchFamily="34" charset="0"/>
-                <a:ea typeface="Calibri" pitchFamily="34" charset="-122"/>
-                <a:cs typeface="Calibri" pitchFamily="34" charset="-120"/>
-              </a:rPr>
-              <a:t>🖥️ Raspberry Pi 4 / Old Laptop</a:t>
-            </a:r>
-            <a:endParaRPr lang="en-US" sz="1200" dirty="0"/>
-          </a:p>
-        </p:txBody>
-      </p:sp>
-      <p:sp>
-        <p:nvSpPr>
-          <p:cNvPr id="23" name="Text 21"/>
-          <p:cNvSpPr/>
-          <p:nvPr/>
-        </p:nvSpPr>
-        <p:spPr>
-          <a:xfrm>
-            <a:off x="4754880" y="2331720"/>
-            <a:ext cx="3566160" cy="274320"/>
-          </a:xfrm>
-          <a:prstGeom prst="rect">
-            <a:avLst/>
-          </a:prstGeom>
-          <a:noFill/>
-          <a:ln/>
-        </p:spPr>
-        <p:txBody>
-          <a:bodyPr wrap="square" rtlCol="0" anchor="ctr"/>
-          <a:lstStyle/>
-          <a:p>
-            <a:pPr indent="0" marL="0">
-              <a:buNone/>
-            </a:pPr>
-            <a:r>
-              <a:rPr lang="en-US" sz="1200" dirty="0">
-                <a:solidFill>
-                  <a:srgbClr val="1B1B1B"/>
-                </a:solidFill>
-                <a:latin typeface="Calibri" pitchFamily="34" charset="0"/>
-                <a:ea typeface="Calibri" pitchFamily="34" charset="-122"/>
-                <a:cs typeface="Calibri" pitchFamily="34" charset="-120"/>
-              </a:rPr>
-              <a:t>📡 Local Wi-Fi (no internet)</a:t>
-            </a:r>
-            <a:endParaRPr lang="en-US" sz="1200" dirty="0"/>
-          </a:p>
-        </p:txBody>
-      </p:sp>
-      <p:sp>
-        <p:nvSpPr>
-          <p:cNvPr id="24" name="Text 22"/>
-          <p:cNvSpPr/>
-          <p:nvPr/>
-        </p:nvSpPr>
-        <p:spPr>
-          <a:xfrm>
-            <a:off x="4754880" y="2651760"/>
-            <a:ext cx="3566160" cy="274320"/>
-          </a:xfrm>
-          <a:prstGeom prst="rect">
-            <a:avLst/>
-          </a:prstGeom>
-          <a:noFill/>
-          <a:ln/>
-        </p:spPr>
-        <p:txBody>
-          <a:bodyPr wrap="square" rtlCol="0" anchor="ctr"/>
-          <a:lstStyle/>
-          <a:p>
-            <a:pPr indent="0" marL="0">
-              <a:buNone/>
-            </a:pPr>
-            <a:r>
-              <a:rPr lang="en-US" sz="1200" dirty="0">
-                <a:solidFill>
-                  <a:srgbClr val="1B1B1B"/>
-                </a:solidFill>
-                <a:latin typeface="Calibri" pitchFamily="34" charset="0"/>
-                <a:ea typeface="Calibri" pitchFamily="34" charset="-122"/>
-                <a:cs typeface="Calibri" pitchFamily="34" charset="-120"/>
-              </a:rPr>
-              <a:t>🤖 Llama-3-8b (offline AI)</a:t>
-            </a:r>
-            <a:endParaRPr lang="en-US" sz="1200" dirty="0"/>
-          </a:p>
-        </p:txBody>
-      </p:sp>
-      <p:sp>
-        <p:nvSpPr>
-          <p:cNvPr id="25" name="Text 23"/>
-          <p:cNvSpPr/>
-          <p:nvPr/>
-        </p:nvSpPr>
-        <p:spPr>
-          <a:xfrm>
-            <a:off x="4754880" y="2971800"/>
-            <a:ext cx="3566160" cy="274320"/>
-          </a:xfrm>
-          <a:prstGeom prst="rect">
-            <a:avLst/>
-          </a:prstGeom>
-          <a:noFill/>
-          <a:ln/>
-        </p:spPr>
-        <p:txBody>
-          <a:bodyPr wrap="square" rtlCol="0" anchor="ctr"/>
-          <a:lstStyle/>
-          <a:p>
-            <a:pPr indent="0" marL="0">
-              <a:buNone/>
-            </a:pPr>
-            <a:r>
-              <a:rPr lang="en-US" sz="1200" dirty="0">
-                <a:solidFill>
-                  <a:srgbClr val="1B1B1B"/>
-                </a:solidFill>
-                <a:latin typeface="Calibri" pitchFamily="34" charset="0"/>
-                <a:ea typeface="Calibri" pitchFamily="34" charset="-122"/>
-                <a:cs typeface="Calibri" pitchFamily="34" charset="-120"/>
-              </a:rPr>
-              <a:t>💾 PouchDB (offline-first DB)</a:t>
-            </a:r>
-            <a:endParaRPr lang="en-US" sz="1200" dirty="0"/>
-          </a:p>
-        </p:txBody>
-      </p:sp>
-      <p:sp>
-        <p:nvSpPr>
-          <p:cNvPr id="26" name="Text 24"/>
-          <p:cNvSpPr/>
-          <p:nvPr/>
-        </p:nvSpPr>
-        <p:spPr>
-          <a:xfrm>
-            <a:off x="4754880" y="3291840"/>
-            <a:ext cx="3566160" cy="274320"/>
-          </a:xfrm>
-          <a:prstGeom prst="rect">
-            <a:avLst/>
-          </a:prstGeom>
-          <a:noFill/>
-          <a:ln/>
-        </p:spPr>
-        <p:txBody>
-          <a:bodyPr wrap="square" rtlCol="0" anchor="ctr"/>
-          <a:lstStyle/>
-          <a:p>
-            <a:pPr indent="0" marL="0">
-              <a:buNone/>
-            </a:pPr>
-            <a:r>
-              <a:rPr lang="en-US" sz="1200" dirty="0">
-                <a:solidFill>
-                  <a:srgbClr val="1B1B1B"/>
-                </a:solidFill>
-                <a:latin typeface="Calibri" pitchFamily="34" charset="0"/>
-                <a:ea typeface="Calibri" pitchFamily="34" charset="-122"/>
-                <a:cs typeface="Calibri" pitchFamily="34" charset="-120"/>
-              </a:rPr>
-              <a:t>📱 PWA (works on cheap phones)</a:t>
-            </a:r>
-            <a:endParaRPr lang="en-US" sz="1200" dirty="0"/>
-          </a:p>
-        </p:txBody>
-      </p:sp>
-      <p:sp>
-        <p:nvSpPr>
-          <p:cNvPr id="27" name="Text 25"/>
-          <p:cNvSpPr/>
-          <p:nvPr/>
-        </p:nvSpPr>
-        <p:spPr>
-          <a:xfrm>
-            <a:off x="4754880" y="3611880"/>
-            <a:ext cx="3566160" cy="274320"/>
-          </a:xfrm>
-          <a:prstGeom prst="rect">
-            <a:avLst/>
-          </a:prstGeom>
-          <a:noFill/>
-          <a:ln/>
-        </p:spPr>
-        <p:txBody>
-          <a:bodyPr wrap="square" rtlCol="0" anchor="ctr"/>
-          <a:lstStyle/>
-          <a:p>
-            <a:pPr indent="0" marL="0">
-              <a:buNone/>
-            </a:pPr>
-            <a:r>
-              <a:rPr lang="en-US" sz="1200" dirty="0">
-                <a:solidFill>
-                  <a:srgbClr val="1B1B1B"/>
-                </a:solidFill>
-                <a:latin typeface="Calibri" pitchFamily="34" charset="0"/>
-                <a:ea typeface="Calibri" pitchFamily="34" charset="-122"/>
-                <a:cs typeface="Calibri" pitchFamily="34" charset="-120"/>
-              </a:rPr>
-              <a:t>🔄 CouchDB sync protocol</a:t>
+                  <a:srgbClr val="424242"/>
+                </a:solidFill>
+              </a:rPr>
+              <a:t>Every future student who asks gets it instantly, fully offline, no matter the device.</a:t>
             </a:r>
             <a:endParaRPr lang="en-US" sz="1200" dirty="0"/>
           </a:p>
@@ -3798,9 +4387,9 @@
 </p:sld>
 </file>
 
-<file path=ppt/slides/slide5.xml><?xml version="1.0" encoding="utf-8"?>
+<file path=ppt/slides/slide6.xml><?xml version="1.0" encoding="utf-8"?>
 <p:sld xmlns:a="http://schemas.openxmlformats.org/drawingml/2006/main" xmlns:r="http://schemas.openxmlformats.org/officeDocument/2006/relationships" xmlns:p="http://schemas.openxmlformats.org/presentationml/2006/main">
-  <p:cSld name="Slide 5">
+  <p:cSld name="Slide 6">
     <p:bg>
       <p:bgPr>
         <a:solidFill>
@@ -3830,20 +4419,20 @@
         </p:nvSpPr>
         <p:spPr>
           <a:xfrm>
-            <a:off x="457200" y="457200"/>
-            <a:ext cx="8229600" cy="640080"/>
-          </a:xfrm>
-          <a:prstGeom prst="rect">
-            <a:avLst/>
-          </a:prstGeom>
-          <a:noFill/>
-          <a:ln/>
-        </p:spPr>
-        <p:txBody>
-          <a:bodyPr wrap="square" rtlCol="0" anchor="ctr"/>
-          <a:lstStyle/>
-          <a:p>
-            <a:pPr indent="0" marL="0">
+            <a:off x="457200" y="365760"/>
+            <a:ext cx="11247120" cy="731520"/>
+          </a:xfrm>
+          <a:prstGeom prst="rect">
+            <a:avLst/>
+          </a:prstGeom>
+          <a:noFill/>
+          <a:ln/>
+        </p:spPr>
+        <p:txBody>
+          <a:bodyPr wrap="square" rtlCol="0" anchor="ctr"/>
+          <a:lstStyle/>
+          <a:p>
+            <a:pPr algn="ctr" indent="0" marL="0">
               <a:buNone/>
             </a:pPr>
             <a:r>
@@ -3851,11 +4440,11 @@
                 <a:solidFill>
                   <a:srgbClr val="B85042"/>
                 </a:solidFill>
-                <a:latin typeface="Georgia" pitchFamily="34" charset="0"/>
-                <a:ea typeface="Georgia" pitchFamily="34" charset="-122"/>
-                <a:cs typeface="Georgia" pitchFamily="34" charset="-120"/>
-              </a:rPr>
-              <a:t>LIVE DEMO: The Interface</a:t>
+                <a:latin typeface="Impact" pitchFamily="34" charset="0"/>
+                <a:ea typeface="Impact" pitchFamily="34" charset="-122"/>
+                <a:cs typeface="Impact" pitchFamily="34" charset="-120"/>
+              </a:rPr>
+              <a:t>LIVE DEMO</a:t>
             </a:r>
             <a:endParaRPr lang="en-US" sz="4400" dirty="0"/>
           </a:p>
@@ -3863,14 +4452,162 @@
       </p:sp>
       <p:sp>
         <p:nvSpPr>
-          <p:cNvPr id="3" name="Shape 1"/>
-          <p:cNvSpPr/>
-          <p:nvPr/>
-        </p:nvSpPr>
-        <p:spPr>
-          <a:xfrm>
-            <a:off x="914400" y="1280160"/>
-            <a:ext cx="7315200" cy="3749040"/>
+          <p:cNvPr id="3" name="Text 1"/>
+          <p:cNvSpPr/>
+          <p:nvPr/>
+        </p:nvSpPr>
+        <p:spPr>
+          <a:xfrm>
+            <a:off x="457200" y="1097280"/>
+            <a:ext cx="11247120" cy="365760"/>
+          </a:xfrm>
+          <a:prstGeom prst="rect">
+            <a:avLst/>
+          </a:prstGeom>
+          <a:noFill/>
+          <a:ln/>
+        </p:spPr>
+        <p:txBody>
+          <a:bodyPr wrap="square" rtlCol="0" anchor="ctr"/>
+          <a:lstStyle/>
+          <a:p>
+            <a:pPr algn="ctr" indent="0" marL="0">
+              <a:buNone/>
+            </a:pPr>
+            <a:r>
+              <a:rPr lang="en-US" sz="1600" i="1" dirty="0">
+                <a:solidFill>
+                  <a:srgbClr val="757575"/>
+                </a:solidFill>
+              </a:rPr>
+              <a:t>(Switching to the live application now)</a:t>
+            </a:r>
+            <a:endParaRPr lang="en-US" sz="1600" dirty="0"/>
+          </a:p>
+        </p:txBody>
+      </p:sp>
+      <p:sp>
+        <p:nvSpPr>
+          <p:cNvPr id="4" name="Text 2"/>
+          <p:cNvSpPr/>
+          <p:nvPr/>
+        </p:nvSpPr>
+        <p:spPr>
+          <a:xfrm>
+            <a:off x="1371600" y="1920240"/>
+            <a:ext cx="9418320" cy="3200400"/>
+          </a:xfrm>
+          <a:prstGeom prst="rect">
+            <a:avLst/>
+          </a:prstGeom>
+          <a:noFill/>
+          <a:ln/>
+        </p:spPr>
+        <p:txBody>
+          <a:bodyPr wrap="square" rtlCol="0" anchor="ctr"/>
+          <a:lstStyle/>
+          <a:p>
+            <a:pPr marL="342900" indent="-342900">
+              <a:spcAft>
+                <a:spcPts val="1000"/>
+              </a:spcAft>
+              <a:buSzPct val="100000"/>
+              <a:buChar char="•"/>
+            </a:pPr>
+            <a:r>
+              <a:rPr lang="en-US" sz="1800" dirty="0">
+                <a:solidFill>
+                  <a:srgbClr val="1B1B1B"/>
+                </a:solidFill>
+              </a:rPr>
+              <a:t>Ask the AI Tutor a question it doesn't know — watch it respond honestly</a:t>
+            </a:r>
+            <a:endParaRPr lang="en-US" sz="1800" dirty="0"/>
+          </a:p>
+          <a:p>
+            <a:pPr marL="342900" indent="-342900">
+              <a:spcAft>
+                <a:spcPts val="1000"/>
+              </a:spcAft>
+              <a:buSzPct val="100000"/>
+              <a:buChar char="•"/>
+            </a:pPr>
+            <a:r>
+              <a:rPr lang="en-US" sz="1800" dirty="0">
+                <a:solidFill>
+                  <a:srgbClr val="1B1B1B"/>
+                </a:solidFill>
+              </a:rPr>
+              <a:t>Click Start Sync — a real internet lookup happens live</a:t>
+            </a:r>
+            <a:endParaRPr lang="en-US" sz="1800" dirty="0"/>
+          </a:p>
+          <a:p>
+            <a:pPr marL="342900" indent="-342900">
+              <a:spcAft>
+                <a:spcPts val="1000"/>
+              </a:spcAft>
+              <a:buSzPct val="100000"/>
+              <a:buChar char="•"/>
+            </a:pPr>
+            <a:r>
+              <a:rPr lang="en-US" sz="1800" dirty="0">
+                <a:solidFill>
+                  <a:srgbClr val="1B1B1B"/>
+                </a:solidFill>
+              </a:rPr>
+              <a:t>See the answer permanently saved to the Village Hub Knowledge Base</a:t>
+            </a:r>
+            <a:endParaRPr lang="en-US" sz="1800" dirty="0"/>
+          </a:p>
+          <a:p>
+            <a:pPr marL="342900" indent="-342900">
+              <a:spcAft>
+                <a:spcPts val="1000"/>
+              </a:spcAft>
+              <a:buSzPct val="100000"/>
+              <a:buChar char="•"/>
+            </a:pPr>
+            <a:r>
+              <a:rPr lang="en-US" sz="1800" dirty="0">
+                <a:solidFill>
+                  <a:srgbClr val="1B1B1B"/>
+                </a:solidFill>
+              </a:rPr>
+              <a:t>Upload a lesson video or ZIMSEC past paper as a teacher</a:t>
+            </a:r>
+            <a:endParaRPr lang="en-US" sz="1800" dirty="0"/>
+          </a:p>
+          <a:p>
+            <a:pPr marL="342900" indent="-342900">
+              <a:spcAft>
+                <a:spcPts val="1000"/>
+              </a:spcAft>
+              <a:buSzPct val="100000"/>
+              <a:buChar char="•"/>
+            </a:pPr>
+            <a:r>
+              <a:rPr lang="en-US" sz="1800" dirty="0">
+                <a:solidFill>
+                  <a:srgbClr val="1B1B1B"/>
+                </a:solidFill>
+              </a:rPr>
+              <a:t>Open a downloaded lesson — real video playback, real download button</a:t>
+            </a:r>
+            <a:endParaRPr lang="en-US" sz="1800" dirty="0"/>
+          </a:p>
+        </p:txBody>
+      </p:sp>
+      <p:sp>
+        <p:nvSpPr>
+          <p:cNvPr id="5" name="Shape 3"/>
+          <p:cNvSpPr/>
+          <p:nvPr/>
+        </p:nvSpPr>
+        <p:spPr>
+          <a:xfrm>
+            <a:off x="1371600" y="5394960"/>
+            <a:ext cx="9418320" cy="822960"/>
           </a:xfrm>
           <a:prstGeom prst="rect">
             <a:avLst/>
@@ -3878,9 +4615,9 @@
           <a:solidFill>
             <a:srgbClr val="FFF3E0"/>
           </a:solidFill>
-          <a:ln w="38100">
+          <a:ln w="25400">
             <a:solidFill>
-              <a:srgbClr val="B85042"/>
+              <a:srgbClr val="FDD835"/>
             </a:solidFill>
             <a:prstDash val="solid"/>
           </a:ln>
@@ -3888,14 +4625,14 @@
       </p:sp>
       <p:sp>
         <p:nvSpPr>
-          <p:cNvPr id="4" name="Text 2"/>
-          <p:cNvSpPr/>
-          <p:nvPr/>
-        </p:nvSpPr>
-        <p:spPr>
-          <a:xfrm>
-            <a:off x="914400" y="1645920"/>
-            <a:ext cx="7315200" cy="548640"/>
+          <p:cNvPr id="6" name="Text 4"/>
+          <p:cNvSpPr/>
+          <p:nvPr/>
+        </p:nvSpPr>
+        <p:spPr>
+          <a:xfrm>
+            <a:off x="1554480" y="5532120"/>
+            <a:ext cx="9052560" cy="548640"/>
           </a:xfrm>
           <a:prstGeom prst="rect">
             <a:avLst/>
@@ -3911,212 +4648,14 @@
               <a:buNone/>
             </a:pPr>
             <a:r>
-              <a:rPr lang="en-US" sz="3200" b="1" dirty="0">
-                <a:solidFill>
-                  <a:srgbClr val="B85042"/>
-                </a:solidFill>
-                <a:latin typeface="Impact" pitchFamily="34" charset="0"/>
-                <a:ea typeface="Impact" pitchFamily="34" charset="-122"/>
-                <a:cs typeface="Impact" pitchFamily="34" charset="-120"/>
-              </a:rPr>
-              <a:t>📱 PWA INTERFACE</a:t>
-            </a:r>
-            <a:endParaRPr lang="en-US" sz="3200" dirty="0"/>
-          </a:p>
-        </p:txBody>
-      </p:sp>
-      <p:sp>
-        <p:nvSpPr>
-          <p:cNvPr id="5" name="Text 3"/>
-          <p:cNvSpPr/>
-          <p:nvPr/>
-        </p:nvSpPr>
-        <p:spPr>
-          <a:xfrm>
-            <a:off x="1371600" y="2377440"/>
-            <a:ext cx="6400800" cy="365760"/>
-          </a:xfrm>
-          <a:prstGeom prst="rect">
-            <a:avLst/>
-          </a:prstGeom>
-          <a:noFill/>
-          <a:ln/>
-        </p:spPr>
-        <p:txBody>
-          <a:bodyPr wrap="square" rtlCol="0" anchor="ctr"/>
-          <a:lstStyle/>
-          <a:p>
-            <a:pPr indent="0" marL="0">
-              <a:buNone/>
-            </a:pPr>
-            <a:r>
-              <a:rPr lang="en-US" sz="1600" dirty="0">
+              <a:rPr lang="en-US" sz="1400" i="1" dirty="0">
                 <a:solidFill>
                   <a:srgbClr val="1B1B1B"/>
                 </a:solidFill>
-                <a:latin typeface="Calibri" pitchFamily="34" charset="0"/>
-                <a:ea typeface="Calibri" pitchFamily="34" charset="-122"/>
-                <a:cs typeface="Calibri" pitchFamily="34" charset="-120"/>
-              </a:rPr>
-              <a:t>✅ Offline AI Tutor (answers in Shona/English)</a:t>
-            </a:r>
-            <a:endParaRPr lang="en-US" sz="1600" dirty="0"/>
-          </a:p>
-        </p:txBody>
-      </p:sp>
-      <p:sp>
-        <p:nvSpPr>
-          <p:cNvPr id="6" name="Text 4"/>
-          <p:cNvSpPr/>
-          <p:nvPr/>
-        </p:nvSpPr>
-        <p:spPr>
-          <a:xfrm>
-            <a:off x="1371600" y="2788920"/>
-            <a:ext cx="6400800" cy="365760"/>
-          </a:xfrm>
-          <a:prstGeom prst="rect">
-            <a:avLst/>
-          </a:prstGeom>
-          <a:noFill/>
-          <a:ln/>
-        </p:spPr>
-        <p:txBody>
-          <a:bodyPr wrap="square" rtlCol="0" anchor="ctr"/>
-          <a:lstStyle/>
-          <a:p>
-            <a:pPr indent="0" marL="0">
-              <a:buNone/>
-            </a:pPr>
-            <a:r>
-              <a:rPr lang="en-US" sz="1600" dirty="0">
-                <a:solidFill>
-                  <a:srgbClr val="1B1B1B"/>
-                </a:solidFill>
-                <a:latin typeface="Calibri" pitchFamily="34" charset="0"/>
-                <a:ea typeface="Calibri" pitchFamily="34" charset="-122"/>
-                <a:cs typeface="Calibri" pitchFamily="34" charset="-120"/>
-              </a:rPr>
-              <a:t>✅ ZIMSEC Curriculum Library (247 lessons)</a:t>
-            </a:r>
-            <a:endParaRPr lang="en-US" sz="1600" dirty="0"/>
-          </a:p>
-        </p:txBody>
-      </p:sp>
-      <p:sp>
-        <p:nvSpPr>
-          <p:cNvPr id="7" name="Text 5"/>
-          <p:cNvSpPr/>
-          <p:nvPr/>
-        </p:nvSpPr>
-        <p:spPr>
-          <a:xfrm>
-            <a:off x="1371600" y="3200400"/>
-            <a:ext cx="6400800" cy="365760"/>
-          </a:xfrm>
-          <a:prstGeom prst="rect">
-            <a:avLst/>
-          </a:prstGeom>
-          <a:noFill/>
-          <a:ln/>
-        </p:spPr>
-        <p:txBody>
-          <a:bodyPr wrap="square" rtlCol="0" anchor="ctr"/>
-          <a:lstStyle/>
-          <a:p>
-            <a:pPr indent="0" marL="0">
-              <a:buNone/>
-            </a:pPr>
-            <a:r>
-              <a:rPr lang="en-US" sz="1600" dirty="0">
-                <a:solidFill>
-                  <a:srgbClr val="1B1B1B"/>
-                </a:solidFill>
-                <a:latin typeface="Calibri" pitchFamily="34" charset="0"/>
-                <a:ea typeface="Calibri" pitchFamily="34" charset="-122"/>
-                <a:cs typeface="Calibri" pitchFamily="34" charset="-120"/>
-              </a:rPr>
-              <a:t>✅ P2P Sharing Dashboard (Wi-Fi Direct)</a:t>
-            </a:r>
-            <a:endParaRPr lang="en-US" sz="1600" dirty="0"/>
-          </a:p>
-        </p:txBody>
-      </p:sp>
-      <p:sp>
-        <p:nvSpPr>
-          <p:cNvPr id="8" name="Text 6"/>
-          <p:cNvSpPr/>
-          <p:nvPr/>
-        </p:nvSpPr>
-        <p:spPr>
-          <a:xfrm>
-            <a:off x="1371600" y="3611880"/>
-            <a:ext cx="6400800" cy="365760"/>
-          </a:xfrm>
-          <a:prstGeom prst="rect">
-            <a:avLst/>
-          </a:prstGeom>
-          <a:noFill/>
-          <a:ln/>
-        </p:spPr>
-        <p:txBody>
-          <a:bodyPr wrap="square" rtlCol="0" anchor="ctr"/>
-          <a:lstStyle/>
-          <a:p>
-            <a:pPr indent="0" marL="0">
-              <a:buNone/>
-            </a:pPr>
-            <a:r>
-              <a:rPr lang="en-US" sz="1600" dirty="0">
-                <a:solidFill>
-                  <a:srgbClr val="1B1B1B"/>
-                </a:solidFill>
-                <a:latin typeface="Calibri" pitchFamily="34" charset="0"/>
-                <a:ea typeface="Calibri" pitchFamily="34" charset="-122"/>
-                <a:cs typeface="Calibri" pitchFamily="34" charset="-120"/>
-              </a:rPr>
-              <a:t>✅ Edu-Coins Gamification System</a:t>
-            </a:r>
-            <a:endParaRPr lang="en-US" sz="1600" dirty="0"/>
-          </a:p>
-        </p:txBody>
-      </p:sp>
-      <p:sp>
-        <p:nvSpPr>
-          <p:cNvPr id="9" name="Text 7"/>
-          <p:cNvSpPr/>
-          <p:nvPr/>
-        </p:nvSpPr>
-        <p:spPr>
-          <a:xfrm>
-            <a:off x="1371600" y="4023360"/>
-            <a:ext cx="6400800" cy="365760"/>
-          </a:xfrm>
-          <a:prstGeom prst="rect">
-            <a:avLst/>
-          </a:prstGeom>
-          <a:noFill/>
-          <a:ln/>
-        </p:spPr>
-        <p:txBody>
-          <a:bodyPr wrap="square" rtlCol="0" anchor="ctr"/>
-          <a:lstStyle/>
-          <a:p>
-            <a:pPr indent="0" marL="0">
-              <a:buNone/>
-            </a:pPr>
-            <a:r>
-              <a:rPr lang="en-US" sz="1600" dirty="0">
-                <a:solidFill>
-                  <a:srgbClr val="1B1B1B"/>
-                </a:solidFill>
-                <a:latin typeface="Calibri" pitchFamily="34" charset="0"/>
-                <a:ea typeface="Calibri" pitchFamily="34" charset="-122"/>
-                <a:cs typeface="Calibri" pitchFamily="34" charset="-120"/>
-              </a:rPr>
-              <a:t>✅ Works on $50 Android phones</a:t>
-            </a:r>
-            <a:endParaRPr lang="en-US" sz="1600" dirty="0"/>
+              </a:rPr>
+              <a:t>localhost:5173 — Village Hub backend running live on this machine</a:t>
+            </a:r>
+            <a:endParaRPr lang="en-US" sz="1400" dirty="0"/>
           </a:p>
         </p:txBody>
       </p:sp>
@@ -4128,9 +4667,9 @@
 </p:sld>
 </file>
 
-<file path=ppt/slides/slide6.xml><?xml version="1.0" encoding="utf-8"?>
+<file path=ppt/slides/slide7.xml><?xml version="1.0" encoding="utf-8"?>
 <p:sld xmlns:a="http://schemas.openxmlformats.org/drawingml/2006/main" xmlns:r="http://schemas.openxmlformats.org/officeDocument/2006/relationships" xmlns:p="http://schemas.openxmlformats.org/presentationml/2006/main">
-  <p:cSld name="Slide 6">
+  <p:cSld name="Slide 7">
     <p:bg>
       <p:bgPr>
         <a:solidFill>
@@ -4160,8 +4699,8 @@
         </p:nvSpPr>
         <p:spPr>
           <a:xfrm>
-            <a:off x="457200" y="457200"/>
-            <a:ext cx="8229600" cy="640080"/>
+            <a:off x="457200" y="365760"/>
+            <a:ext cx="11247120" cy="731520"/>
           </a:xfrm>
           <a:prstGeom prst="rect">
             <a:avLst/>
@@ -4177,7 +4716,7 @@
               <a:buNone/>
             </a:pPr>
             <a:r>
-              <a:rPr lang="en-US" sz="4400" b="1" dirty="0">
+              <a:rPr lang="en-US" sz="4000" b="1" dirty="0">
                 <a:solidFill>
                   <a:srgbClr val="1B1B1B"/>
                 </a:solidFill>
@@ -4187,7 +4726,7 @@
               </a:rPr>
               <a:t>SOCIAL IMPACT</a:t>
             </a:r>
-            <a:endParaRPr lang="en-US" sz="4400" dirty="0"/>
+            <a:endParaRPr lang="en-US" sz="4000" dirty="0"/>
           </a:p>
         </p:txBody>
       </p:sp>
@@ -4199,8 +4738,8 @@
         </p:nvSpPr>
         <p:spPr>
           <a:xfrm>
-            <a:off x="457200" y="1371600"/>
-            <a:ext cx="2560320" cy="2011680"/>
+            <a:off x="457200" y="1554480"/>
+            <a:ext cx="2606040" cy="2103120"/>
           </a:xfrm>
           <a:prstGeom prst="rect">
             <a:avLst/>
@@ -4224,8 +4763,8 @@
         </p:nvSpPr>
         <p:spPr>
           <a:xfrm>
-            <a:off x="457200" y="1645920"/>
-            <a:ext cx="2560320" cy="731520"/>
+            <a:off x="457200" y="1828800"/>
+            <a:ext cx="2606040" cy="822960"/>
           </a:xfrm>
           <a:prstGeom prst="rect">
             <a:avLst/>
@@ -4241,7 +4780,7 @@
               <a:buNone/>
             </a:pPr>
             <a:r>
-              <a:rPr lang="en-US" sz="4800" b="1" dirty="0">
+              <a:rPr lang="en-US" sz="4200" b="1" dirty="0">
                 <a:solidFill>
                   <a:srgbClr val="2E7D32"/>
                 </a:solidFill>
@@ -4251,7 +4790,7 @@
               </a:rPr>
               <a:t>$0.00</a:t>
             </a:r>
-            <a:endParaRPr lang="en-US" sz="4800" dirty="0"/>
+            <a:endParaRPr lang="en-US" sz="4200" dirty="0"/>
           </a:p>
         </p:txBody>
       </p:sp>
@@ -4263,8 +4802,8 @@
         </p:nvSpPr>
         <p:spPr>
           <a:xfrm>
-            <a:off x="457200" y="2468880"/>
-            <a:ext cx="2560320" cy="731520"/>
+            <a:off x="457200" y="2697480"/>
+            <a:ext cx="2606040" cy="731520"/>
           </a:xfrm>
           <a:prstGeom prst="rect">
             <a:avLst/>
@@ -4280,34 +4819,28 @@
               <a:buNone/>
             </a:pPr>
             <a:r>
-              <a:rPr lang="en-US" sz="1600" dirty="0">
+              <a:rPr lang="en-US" sz="1500" dirty="0">
                 <a:solidFill>
                   <a:srgbClr val="1B1B1B"/>
                 </a:solidFill>
-                <a:latin typeface="Calibri" pitchFamily="34" charset="0"/>
-                <a:ea typeface="Calibri" pitchFamily="34" charset="-122"/>
-                <a:cs typeface="Calibri" pitchFamily="34" charset="-120"/>
               </a:rPr>
               <a:t>Data Cost</a:t>
             </a:r>
-            <a:endParaRPr lang="en-US" sz="1600" dirty="0"/>
+            <a:endParaRPr lang="en-US" sz="1500" dirty="0"/>
           </a:p>
           <a:p>
             <a:pPr algn="ctr" indent="0" marL="0">
               <a:buNone/>
             </a:pPr>
             <a:r>
-              <a:rPr lang="en-US" sz="1600" dirty="0">
+              <a:rPr lang="en-US" sz="1500" dirty="0">
                 <a:solidFill>
                   <a:srgbClr val="1B1B1B"/>
                 </a:solidFill>
-                <a:latin typeface="Calibri" pitchFamily="34" charset="0"/>
-                <a:ea typeface="Calibri" pitchFamily="34" charset="-122"/>
-                <a:cs typeface="Calibri" pitchFamily="34" charset="-120"/>
               </a:rPr>
               <a:t>Per Student</a:t>
             </a:r>
-            <a:endParaRPr lang="en-US" sz="1600" dirty="0"/>
+            <a:endParaRPr lang="en-US" sz="1500" dirty="0"/>
           </a:p>
         </p:txBody>
       </p:sp>
@@ -4319,8 +4852,8 @@
         </p:nvSpPr>
         <p:spPr>
           <a:xfrm>
-            <a:off x="3200400" y="1371600"/>
-            <a:ext cx="2560320" cy="2011680"/>
+            <a:off x="3291840" y="1554480"/>
+            <a:ext cx="2606040" cy="2103120"/>
           </a:xfrm>
           <a:prstGeom prst="rect">
             <a:avLst/>
@@ -4344,8 +4877,8 @@
         </p:nvSpPr>
         <p:spPr>
           <a:xfrm>
-            <a:off x="3200400" y="1645920"/>
-            <a:ext cx="2560320" cy="731520"/>
+            <a:off x="3291840" y="1828800"/>
+            <a:ext cx="2606040" cy="822960"/>
           </a:xfrm>
           <a:prstGeom prst="rect">
             <a:avLst/>
@@ -4361,7 +4894,7 @@
               <a:buNone/>
             </a:pPr>
             <a:r>
-              <a:rPr lang="en-US" sz="4800" b="1" dirty="0">
+              <a:rPr lang="en-US" sz="4200" b="1" dirty="0">
                 <a:solidFill>
                   <a:srgbClr val="B85042"/>
                 </a:solidFill>
@@ -4371,7 +4904,7 @@
               </a:rPr>
               <a:t>200+</a:t>
             </a:r>
-            <a:endParaRPr lang="en-US" sz="4800" dirty="0"/>
+            <a:endParaRPr lang="en-US" sz="4200" dirty="0"/>
           </a:p>
         </p:txBody>
       </p:sp>
@@ -4383,8 +4916,8 @@
         </p:nvSpPr>
         <p:spPr>
           <a:xfrm>
-            <a:off x="3200400" y="2468880"/>
-            <a:ext cx="2560320" cy="731520"/>
+            <a:off x="3291840" y="2697480"/>
+            <a:ext cx="2606040" cy="731520"/>
           </a:xfrm>
           <a:prstGeom prst="rect">
             <a:avLst/>
@@ -4400,34 +4933,28 @@
               <a:buNone/>
             </a:pPr>
             <a:r>
-              <a:rPr lang="en-US" sz="1600" dirty="0">
+              <a:rPr lang="en-US" sz="1500" dirty="0">
                 <a:solidFill>
                   <a:srgbClr val="1B1B1B"/>
                 </a:solidFill>
-                <a:latin typeface="Calibri" pitchFamily="34" charset="0"/>
-                <a:ea typeface="Calibri" pitchFamily="34" charset="-122"/>
-                <a:cs typeface="Calibri" pitchFamily="34" charset="-120"/>
               </a:rPr>
               <a:t>Students</a:t>
             </a:r>
-            <a:endParaRPr lang="en-US" sz="1600" dirty="0"/>
+            <a:endParaRPr lang="en-US" sz="1500" dirty="0"/>
           </a:p>
           <a:p>
             <a:pPr algn="ctr" indent="0" marL="0">
               <a:buNone/>
             </a:pPr>
             <a:r>
-              <a:rPr lang="en-US" sz="1600" dirty="0">
+              <a:rPr lang="en-US" sz="1500" dirty="0">
                 <a:solidFill>
                   <a:srgbClr val="1B1B1B"/>
                 </a:solidFill>
-                <a:latin typeface="Calibri" pitchFamily="34" charset="0"/>
-                <a:ea typeface="Calibri" pitchFamily="34" charset="-122"/>
-                <a:cs typeface="Calibri" pitchFamily="34" charset="-120"/>
               </a:rPr>
               <a:t>Per Hub</a:t>
             </a:r>
-            <a:endParaRPr lang="en-US" sz="1600" dirty="0"/>
+            <a:endParaRPr lang="en-US" sz="1500" dirty="0"/>
           </a:p>
         </p:txBody>
       </p:sp>
@@ -4439,8 +4966,8 @@
         </p:nvSpPr>
         <p:spPr>
           <a:xfrm>
-            <a:off x="5943600" y="1371600"/>
-            <a:ext cx="2560320" cy="2011680"/>
+            <a:off x="6126480" y="1554480"/>
+            <a:ext cx="2606040" cy="2103120"/>
           </a:xfrm>
           <a:prstGeom prst="rect">
             <a:avLst/>
@@ -4464,8 +4991,8 @@
         </p:nvSpPr>
         <p:spPr>
           <a:xfrm>
-            <a:off x="5943600" y="1645920"/>
-            <a:ext cx="2560320" cy="731520"/>
+            <a:off x="6126480" y="1828800"/>
+            <a:ext cx="2606040" cy="822960"/>
           </a:xfrm>
           <a:prstGeom prst="rect">
             <a:avLst/>
@@ -4481,7 +5008,7 @@
               <a:buNone/>
             </a:pPr>
             <a:r>
-              <a:rPr lang="en-US" sz="4800" b="1" dirty="0">
+              <a:rPr lang="en-US" sz="4200" b="1" dirty="0">
                 <a:solidFill>
                   <a:srgbClr val="1976D2"/>
                 </a:solidFill>
@@ -4491,7 +5018,7 @@
               </a:rPr>
               <a:t>$50</a:t>
             </a:r>
-            <a:endParaRPr lang="en-US" sz="4800" dirty="0"/>
+            <a:endParaRPr lang="en-US" sz="4200" dirty="0"/>
           </a:p>
         </p:txBody>
       </p:sp>
@@ -4503,8 +5030,8 @@
         </p:nvSpPr>
         <p:spPr>
           <a:xfrm>
-            <a:off x="5943600" y="2468880"/>
-            <a:ext cx="2560320" cy="731520"/>
+            <a:off x="6126480" y="2697480"/>
+            <a:ext cx="2606040" cy="731520"/>
           </a:xfrm>
           <a:prstGeom prst="rect">
             <a:avLst/>
@@ -4520,343 +5047,51 @@
               <a:buNone/>
             </a:pPr>
             <a:r>
-              <a:rPr lang="en-US" sz="1600" dirty="0">
+              <a:rPr lang="en-US" sz="1500" dirty="0">
                 <a:solidFill>
                   <a:srgbClr val="1B1B1B"/>
                 </a:solidFill>
-                <a:latin typeface="Calibri" pitchFamily="34" charset="0"/>
-                <a:ea typeface="Calibri" pitchFamily="34" charset="-122"/>
-                <a:cs typeface="Calibri" pitchFamily="34" charset="-120"/>
               </a:rPr>
               <a:t>Total Setup</a:t>
             </a:r>
-            <a:endParaRPr lang="en-US" sz="1600" dirty="0"/>
+            <a:endParaRPr lang="en-US" sz="1500" dirty="0"/>
           </a:p>
           <a:p>
             <a:pPr algn="ctr" indent="0" marL="0">
               <a:buNone/>
             </a:pPr>
             <a:r>
-              <a:rPr lang="en-US" sz="1600" dirty="0">
+              <a:rPr lang="en-US" sz="1500" dirty="0">
                 <a:solidFill>
                   <a:srgbClr val="1B1B1B"/>
                 </a:solidFill>
-                <a:latin typeface="Calibri" pitchFamily="34" charset="0"/>
-                <a:ea typeface="Calibri" pitchFamily="34" charset="-122"/>
-                <a:cs typeface="Calibri" pitchFamily="34" charset="-120"/>
               </a:rPr>
               <a:t>Cost</a:t>
             </a:r>
-            <a:endParaRPr lang="en-US" sz="1600" dirty="0"/>
-          </a:p>
-        </p:txBody>
-      </p:sp>
-      <p:sp>
-        <p:nvSpPr>
-          <p:cNvPr id="12" name="Text 10"/>
-          <p:cNvSpPr/>
-          <p:nvPr/>
-        </p:nvSpPr>
-        <p:spPr>
-          <a:xfrm>
-            <a:off x="457200" y="3840480"/>
-            <a:ext cx="8229600" cy="457200"/>
-          </a:xfrm>
-          <a:prstGeom prst="rect">
-            <a:avLst/>
-          </a:prstGeom>
-          <a:noFill/>
-          <a:ln/>
-        </p:spPr>
-        <p:txBody>
-          <a:bodyPr wrap="square" rtlCol="0" anchor="ctr"/>
-          <a:lstStyle/>
-          <a:p>
-            <a:pPr algn="ctr" indent="0" marL="0">
-              <a:buNone/>
-            </a:pPr>
-            <a:r>
-              <a:rPr lang="en-US" sz="2000" b="1" i="1" dirty="0">
-                <a:solidFill>
-                  <a:srgbClr val="1B1B1B"/>
-                </a:solidFill>
-                <a:latin typeface="Trebuchet MS" pitchFamily="34" charset="0"/>
-                <a:ea typeface="Trebuchet MS" pitchFamily="34" charset="-122"/>
-                <a:cs typeface="Trebuchet MS" pitchFamily="34" charset="-120"/>
-              </a:rPr>
-              <a:t>Scalable to every rural school in Zimbabwe</a:t>
-            </a:r>
-            <a:endParaRPr lang="en-US" sz="2000" dirty="0"/>
-          </a:p>
-        </p:txBody>
-      </p:sp>
-      <p:sp>
-        <p:nvSpPr>
-          <p:cNvPr id="13" name="Text 11"/>
-          <p:cNvSpPr/>
-          <p:nvPr/>
-        </p:nvSpPr>
-        <p:spPr>
-          <a:xfrm>
-            <a:off x="457200" y="4389120"/>
-            <a:ext cx="8229600" cy="365760"/>
-          </a:xfrm>
-          <a:prstGeom prst="rect">
-            <a:avLst/>
-          </a:prstGeom>
-          <a:noFill/>
-          <a:ln/>
-        </p:spPr>
-        <p:txBody>
-          <a:bodyPr wrap="square" rtlCol="0" anchor="ctr"/>
-          <a:lstStyle/>
-          <a:p>
-            <a:pPr algn="ctr" indent="0" marL="0">
-              <a:buNone/>
-            </a:pPr>
-            <a:r>
-              <a:rPr lang="en-US" sz="1800" dirty="0">
-                <a:solidFill>
-                  <a:srgbClr val="1B1B1B"/>
-                </a:solidFill>
-                <a:latin typeface="Calibri" pitchFamily="34" charset="0"/>
-                <a:ea typeface="Calibri" pitchFamily="34" charset="-122"/>
-                <a:cs typeface="Calibri" pitchFamily="34" charset="-120"/>
-              </a:rPr>
-              <a:t>Closes the 43% pass rate gap between rural and urban students</a:t>
-            </a:r>
-            <a:endParaRPr lang="en-US" sz="1800" dirty="0"/>
-          </a:p>
-        </p:txBody>
-      </p:sp>
-    </p:spTree>
-  </p:cSld>
-  <p:clrMapOvr>
-    <a:masterClrMapping/>
-  </p:clrMapOvr>
-</p:sld>
-</file>
-
-<file path=ppt/slides/slide7.xml><?xml version="1.0" encoding="utf-8"?>
-<p:sld xmlns:a="http://schemas.openxmlformats.org/drawingml/2006/main" xmlns:r="http://schemas.openxmlformats.org/officeDocument/2006/relationships" xmlns:p="http://schemas.openxmlformats.org/presentationml/2006/main">
-  <p:cSld name="Slide 7">
-    <p:bg>
-      <p:bgPr>
-        <a:solidFill>
-          <a:srgbClr val="FFFFFF"/>
-        </a:solidFill>
-      </p:bgPr>
-    </p:bg>
-    <p:spTree>
-      <p:nvGrpSpPr>
-        <p:cNvPr id="1" name=""/>
-        <p:cNvGrpSpPr/>
-        <p:nvPr/>
-      </p:nvGrpSpPr>
-      <p:grpSpPr>
-        <a:xfrm>
-          <a:off x="0" y="0"/>
-          <a:ext cx="0" cy="0"/>
-          <a:chOff x="0" y="0"/>
-          <a:chExt cx="0" cy="0"/>
-        </a:xfrm>
-      </p:grpSpPr>
-      <p:sp>
-        <p:nvSpPr>
-          <p:cNvPr id="2" name="Text 0"/>
-          <p:cNvSpPr/>
-          <p:nvPr/>
-        </p:nvSpPr>
-        <p:spPr>
-          <a:xfrm>
-            <a:off x="457200" y="457200"/>
-            <a:ext cx="8229600" cy="640080"/>
-          </a:xfrm>
-          <a:prstGeom prst="rect">
-            <a:avLst/>
-          </a:prstGeom>
-          <a:noFill/>
-          <a:ln/>
-        </p:spPr>
-        <p:txBody>
-          <a:bodyPr wrap="square" rtlCol="0" anchor="ctr"/>
-          <a:lstStyle/>
-          <a:p>
-            <a:pPr indent="0" marL="0">
-              <a:buNone/>
-            </a:pPr>
-            <a:r>
-              <a:rPr lang="en-US" sz="4400" b="1" dirty="0">
-                <a:solidFill>
-                  <a:srgbClr val="B85042"/>
-                </a:solidFill>
-                <a:latin typeface="Georgia" pitchFamily="34" charset="0"/>
-                <a:ea typeface="Georgia" pitchFamily="34" charset="-122"/>
-                <a:cs typeface="Georgia" pitchFamily="34" charset="-120"/>
-              </a:rPr>
-              <a:t>WHY WE'LL WIN</a:t>
-            </a:r>
-            <a:endParaRPr lang="en-US" sz="4400" dirty="0"/>
-          </a:p>
-        </p:txBody>
-      </p:sp>
-      <p:sp>
-        <p:nvSpPr>
-          <p:cNvPr id="3" name="Shape 1"/>
-          <p:cNvSpPr/>
-          <p:nvPr/>
-        </p:nvSpPr>
-        <p:spPr>
-          <a:xfrm>
-            <a:off x="457200" y="1280160"/>
-            <a:ext cx="8229600" cy="548640"/>
+            <a:endParaRPr lang="en-US" sz="1500" dirty="0"/>
+          </a:p>
+        </p:txBody>
+      </p:sp>
+      <p:sp>
+        <p:nvSpPr>
+          <p:cNvPr id="12" name="Shape 10"/>
+          <p:cNvSpPr/>
+          <p:nvPr/>
+        </p:nvSpPr>
+        <p:spPr>
+          <a:xfrm>
+            <a:off x="8961120" y="1554480"/>
+            <a:ext cx="2606040" cy="2103120"/>
           </a:xfrm>
           <a:prstGeom prst="rect">
             <a:avLst/>
           </a:prstGeom>
           <a:solidFill>
-            <a:srgbClr val="B85042"/>
+            <a:srgbClr val="FFFFFF"/>
           </a:solidFill>
-          <a:ln/>
-        </p:spPr>
-      </p:sp>
-      <p:sp>
-        <p:nvSpPr>
-          <p:cNvPr id="4" name="Text 2"/>
-          <p:cNvSpPr/>
-          <p:nvPr/>
-        </p:nvSpPr>
-        <p:spPr>
-          <a:xfrm>
-            <a:off x="640080" y="1371600"/>
-            <a:ext cx="2743200" cy="365760"/>
-          </a:xfrm>
-          <a:prstGeom prst="rect">
-            <a:avLst/>
-          </a:prstGeom>
-          <a:noFill/>
-          <a:ln/>
-        </p:spPr>
-        <p:txBody>
-          <a:bodyPr wrap="square" rtlCol="0" anchor="ctr"/>
-          <a:lstStyle/>
-          <a:p>
-            <a:pPr indent="0" marL="0">
-              <a:buNone/>
-            </a:pPr>
-            <a:r>
-              <a:rPr lang="en-US" sz="1600" b="1" dirty="0">
-                <a:solidFill>
-                  <a:srgbClr val="FFFFFF"/>
-                </a:solidFill>
-                <a:latin typeface="Trebuchet MS" pitchFamily="34" charset="0"/>
-                <a:ea typeface="Trebuchet MS" pitchFamily="34" charset="-122"/>
-                <a:cs typeface="Trebuchet MS" pitchFamily="34" charset="-120"/>
-              </a:rPr>
-              <a:t>Innovation Criteria</a:t>
-            </a:r>
-            <a:endParaRPr lang="en-US" sz="1600" dirty="0"/>
-          </a:p>
-        </p:txBody>
-      </p:sp>
-      <p:sp>
-        <p:nvSpPr>
-          <p:cNvPr id="5" name="Text 3"/>
-          <p:cNvSpPr/>
-          <p:nvPr/>
-        </p:nvSpPr>
-        <p:spPr>
-          <a:xfrm>
-            <a:off x="3566160" y="1371600"/>
-            <a:ext cx="2286000" cy="365760"/>
-          </a:xfrm>
-          <a:prstGeom prst="rect">
-            <a:avLst/>
-          </a:prstGeom>
-          <a:noFill/>
-          <a:ln/>
-        </p:spPr>
-        <p:txBody>
-          <a:bodyPr wrap="square" rtlCol="0" anchor="ctr"/>
-          <a:lstStyle/>
-          <a:p>
-            <a:pPr algn="ctr" indent="0" marL="0">
-              <a:buNone/>
-            </a:pPr>
-            <a:r>
-              <a:rPr lang="en-US" sz="1600" b="1" dirty="0">
-                <a:solidFill>
-                  <a:srgbClr val="FFFFFF"/>
-                </a:solidFill>
-                <a:latin typeface="Trebuchet MS" pitchFamily="34" charset="0"/>
-                <a:ea typeface="Trebuchet MS" pitchFamily="34" charset="-122"/>
-                <a:cs typeface="Trebuchet MS" pitchFamily="34" charset="-120"/>
-              </a:rPr>
-              <a:t>Other Solutions</a:t>
-            </a:r>
-            <a:endParaRPr lang="en-US" sz="1600" dirty="0"/>
-          </a:p>
-        </p:txBody>
-      </p:sp>
-      <p:sp>
-        <p:nvSpPr>
-          <p:cNvPr id="6" name="Text 4"/>
-          <p:cNvSpPr/>
-          <p:nvPr/>
-        </p:nvSpPr>
-        <p:spPr>
-          <a:xfrm>
-            <a:off x="6035040" y="1371600"/>
-            <a:ext cx="2468880" cy="365760"/>
-          </a:xfrm>
-          <a:prstGeom prst="rect">
-            <a:avLst/>
-          </a:prstGeom>
-          <a:noFill/>
-          <a:ln/>
-        </p:spPr>
-        <p:txBody>
-          <a:bodyPr wrap="square" rtlCol="0" anchor="ctr"/>
-          <a:lstStyle/>
-          <a:p>
-            <a:pPr algn="ctr" indent="0" marL="0">
-              <a:buNone/>
-            </a:pPr>
-            <a:r>
-              <a:rPr lang="en-US" sz="1600" b="1" dirty="0">
-                <a:solidFill>
-                  <a:srgbClr val="FFFFFF"/>
-                </a:solidFill>
-                <a:latin typeface="Trebuchet MS" pitchFamily="34" charset="0"/>
-                <a:ea typeface="Trebuchet MS" pitchFamily="34" charset="-122"/>
-                <a:cs typeface="Trebuchet MS" pitchFamily="34" charset="-120"/>
-              </a:rPr>
-              <a:t>Edu-Sync Mesh</a:t>
-            </a:r>
-            <a:endParaRPr lang="en-US" sz="1600" dirty="0"/>
-          </a:p>
-        </p:txBody>
-      </p:sp>
-      <p:sp>
-        <p:nvSpPr>
-          <p:cNvPr id="7" name="Shape 5"/>
-          <p:cNvSpPr/>
-          <p:nvPr/>
-        </p:nvSpPr>
-        <p:spPr>
-          <a:xfrm>
-            <a:off x="457200" y="1920240"/>
-            <a:ext cx="8229600" cy="457200"/>
-          </a:xfrm>
-          <a:prstGeom prst="rect">
-            <a:avLst/>
-          </a:prstGeom>
-          <a:solidFill>
-            <a:srgbClr val="F5F5F5"/>
-          </a:solidFill>
-          <a:ln w="12700">
+          <a:ln w="50800">
             <a:solidFill>
-              <a:srgbClr val="E0E0E0"/>
+              <a:srgbClr val="6A1B9A"/>
             </a:solidFill>
             <a:prstDash val="solid"/>
           </a:ln>
@@ -4864,92 +5099,103 @@
       </p:sp>
       <p:sp>
         <p:nvSpPr>
-          <p:cNvPr id="8" name="Text 6"/>
-          <p:cNvSpPr/>
-          <p:nvPr/>
-        </p:nvSpPr>
-        <p:spPr>
-          <a:xfrm>
-            <a:off x="640080" y="1965960"/>
-            <a:ext cx="2743200" cy="365760"/>
-          </a:xfrm>
-          <a:prstGeom prst="rect">
-            <a:avLst/>
-          </a:prstGeom>
-          <a:noFill/>
-          <a:ln/>
-        </p:spPr>
-        <p:txBody>
-          <a:bodyPr wrap="square" rtlCol="0" anchor="ctr"/>
-          <a:lstStyle/>
-          <a:p>
-            <a:pPr indent="0" marL="0">
-              <a:buNone/>
-            </a:pPr>
-            <a:r>
-              <a:rPr lang="en-US" sz="1400" b="1" dirty="0">
+          <p:cNvPr id="13" name="Text 11"/>
+          <p:cNvSpPr/>
+          <p:nvPr/>
+        </p:nvSpPr>
+        <p:spPr>
+          <a:xfrm>
+            <a:off x="8961120" y="1828800"/>
+            <a:ext cx="2606040" cy="822960"/>
+          </a:xfrm>
+          <a:prstGeom prst="rect">
+            <a:avLst/>
+          </a:prstGeom>
+          <a:noFill/>
+          <a:ln/>
+        </p:spPr>
+        <p:txBody>
+          <a:bodyPr wrap="square" rtlCol="0" anchor="ctr"/>
+          <a:lstStyle/>
+          <a:p>
+            <a:pPr algn="ctr" indent="0" marL="0">
+              <a:buNone/>
+            </a:pPr>
+            <a:r>
+              <a:rPr lang="en-US" sz="4200" b="1" dirty="0">
+                <a:solidFill>
+                  <a:srgbClr val="6A1B9A"/>
+                </a:solidFill>
+                <a:latin typeface="Impact" pitchFamily="34" charset="0"/>
+                <a:ea typeface="Impact" pitchFamily="34" charset="-122"/>
+                <a:cs typeface="Impact" pitchFamily="34" charset="-120"/>
+              </a:rPr>
+              <a:t>9</a:t>
+            </a:r>
+            <a:endParaRPr lang="en-US" sz="4200" dirty="0"/>
+          </a:p>
+        </p:txBody>
+      </p:sp>
+      <p:sp>
+        <p:nvSpPr>
+          <p:cNvPr id="14" name="Text 12"/>
+          <p:cNvSpPr/>
+          <p:nvPr/>
+        </p:nvSpPr>
+        <p:spPr>
+          <a:xfrm>
+            <a:off x="8961120" y="2697480"/>
+            <a:ext cx="2606040" cy="731520"/>
+          </a:xfrm>
+          <a:prstGeom prst="rect">
+            <a:avLst/>
+          </a:prstGeom>
+          <a:noFill/>
+          <a:ln/>
+        </p:spPr>
+        <p:txBody>
+          <a:bodyPr wrap="square" rtlCol="0" anchor="ctr"/>
+          <a:lstStyle/>
+          <a:p>
+            <a:pPr algn="ctr" indent="0" marL="0">
+              <a:buNone/>
+            </a:pPr>
+            <a:r>
+              <a:rPr lang="en-US" sz="1500" dirty="0">
                 <a:solidFill>
                   <a:srgbClr val="1B1B1B"/>
                 </a:solidFill>
-                <a:latin typeface="Calibri" pitchFamily="34" charset="0"/>
-                <a:ea typeface="Calibri" pitchFamily="34" charset="-122"/>
-                <a:cs typeface="Calibri" pitchFamily="34" charset="-120"/>
-              </a:rPr>
-              <a:t>Works Offline</a:t>
-            </a:r>
-            <a:endParaRPr lang="en-US" sz="1400" dirty="0"/>
-          </a:p>
-        </p:txBody>
-      </p:sp>
-      <p:sp>
-        <p:nvSpPr>
-          <p:cNvPr id="9" name="Text 7"/>
-          <p:cNvSpPr/>
-          <p:nvPr/>
-        </p:nvSpPr>
-        <p:spPr>
-          <a:xfrm>
-            <a:off x="3566160" y="1965960"/>
-            <a:ext cx="2286000" cy="365760"/>
-          </a:xfrm>
-          <a:prstGeom prst="rect">
-            <a:avLst/>
-          </a:prstGeom>
-          <a:noFill/>
-          <a:ln/>
-        </p:spPr>
-        <p:txBody>
-          <a:bodyPr wrap="square" rtlCol="0" anchor="ctr"/>
-          <a:lstStyle/>
+              </a:rPr>
+              <a:t>ZIMSEC Subjects</a:t>
+            </a:r>
+            <a:endParaRPr lang="en-US" sz="1500" dirty="0"/>
+          </a:p>
           <a:p>
             <a:pPr algn="ctr" indent="0" marL="0">
               <a:buNone/>
             </a:pPr>
             <a:r>
-              <a:rPr lang="en-US" sz="1300" dirty="0">
-                <a:solidFill>
-                  <a:srgbClr val="D32F2F"/>
-                </a:solidFill>
-                <a:latin typeface="Calibri" pitchFamily="34" charset="0"/>
-                <a:ea typeface="Calibri" pitchFamily="34" charset="-122"/>
-                <a:cs typeface="Calibri" pitchFamily="34" charset="-120"/>
-              </a:rPr>
-              <a:t>❌ Needs Internet</a:t>
-            </a:r>
-            <a:endParaRPr lang="en-US" sz="1300" dirty="0"/>
-          </a:p>
-        </p:txBody>
-      </p:sp>
-      <p:sp>
-        <p:nvSpPr>
-          <p:cNvPr id="10" name="Text 8"/>
-          <p:cNvSpPr/>
-          <p:nvPr/>
-        </p:nvSpPr>
-        <p:spPr>
-          <a:xfrm>
-            <a:off x="6035040" y="1965960"/>
-            <a:ext cx="2468880" cy="365760"/>
+              <a:rPr lang="en-US" sz="1500" dirty="0">
+                <a:solidFill>
+                  <a:srgbClr val="1B1B1B"/>
+                </a:solidFill>
+              </a:rPr>
+              <a:t>Covered Today</a:t>
+            </a:r>
+            <a:endParaRPr lang="en-US" sz="1500" dirty="0"/>
+          </a:p>
+        </p:txBody>
+      </p:sp>
+      <p:sp>
+        <p:nvSpPr>
+          <p:cNvPr id="15" name="Text 13"/>
+          <p:cNvSpPr/>
+          <p:nvPr/>
+        </p:nvSpPr>
+        <p:spPr>
+          <a:xfrm>
+            <a:off x="457200" y="4114800"/>
+            <a:ext cx="11247120" cy="457200"/>
           </a:xfrm>
           <a:prstGeom prst="rect">
             <a:avLst/>
@@ -4965,94 +5211,27 @@
               <a:buNone/>
             </a:pPr>
             <a:r>
-              <a:rPr lang="en-US" sz="1300" b="1" dirty="0">
-                <a:solidFill>
-                  <a:srgbClr val="2E7D32"/>
-                </a:solidFill>
-                <a:latin typeface="Calibri" pitchFamily="34" charset="0"/>
-                <a:ea typeface="Calibri" pitchFamily="34" charset="-122"/>
-                <a:cs typeface="Calibri" pitchFamily="34" charset="-120"/>
-              </a:rPr>
-              <a:t>✅ 100% Offline</a:t>
-            </a:r>
-            <a:endParaRPr lang="en-US" sz="1300" dirty="0"/>
-          </a:p>
-        </p:txBody>
-      </p:sp>
-      <p:sp>
-        <p:nvSpPr>
-          <p:cNvPr id="11" name="Shape 9"/>
-          <p:cNvSpPr/>
-          <p:nvPr/>
-        </p:nvSpPr>
-        <p:spPr>
-          <a:xfrm>
-            <a:off x="457200" y="2468880"/>
-            <a:ext cx="8229600" cy="457200"/>
-          </a:xfrm>
-          <a:prstGeom prst="rect">
-            <a:avLst/>
-          </a:prstGeom>
-          <a:solidFill>
-            <a:srgbClr val="FFFFFF"/>
-          </a:solidFill>
-          <a:ln w="12700">
-            <a:solidFill>
-              <a:srgbClr val="E0E0E0"/>
-            </a:solidFill>
-            <a:prstDash val="solid"/>
-          </a:ln>
-        </p:spPr>
-      </p:sp>
-      <p:sp>
-        <p:nvSpPr>
-          <p:cNvPr id="12" name="Text 10"/>
-          <p:cNvSpPr/>
-          <p:nvPr/>
-        </p:nvSpPr>
-        <p:spPr>
-          <a:xfrm>
-            <a:off x="640080" y="2514600"/>
-            <a:ext cx="2743200" cy="365760"/>
-          </a:xfrm>
-          <a:prstGeom prst="rect">
-            <a:avLst/>
-          </a:prstGeom>
-          <a:noFill/>
-          <a:ln/>
-        </p:spPr>
-        <p:txBody>
-          <a:bodyPr wrap="square" rtlCol="0" anchor="ctr"/>
-          <a:lstStyle/>
-          <a:p>
-            <a:pPr indent="0" marL="0">
-              <a:buNone/>
-            </a:pPr>
-            <a:r>
-              <a:rPr lang="en-US" sz="1400" b="1" dirty="0">
+              <a:rPr lang="en-US" sz="2200" b="1" i="1" dirty="0">
                 <a:solidFill>
                   <a:srgbClr val="1B1B1B"/>
                 </a:solidFill>
-                <a:latin typeface="Calibri" pitchFamily="34" charset="0"/>
-                <a:ea typeface="Calibri" pitchFamily="34" charset="-122"/>
-                <a:cs typeface="Calibri" pitchFamily="34" charset="-120"/>
-              </a:rPr>
-              <a:t>Data Cost</a:t>
-            </a:r>
-            <a:endParaRPr lang="en-US" sz="1400" dirty="0"/>
-          </a:p>
-        </p:txBody>
-      </p:sp>
-      <p:sp>
-        <p:nvSpPr>
-          <p:cNvPr id="13" name="Text 11"/>
-          <p:cNvSpPr/>
-          <p:nvPr/>
-        </p:nvSpPr>
-        <p:spPr>
-          <a:xfrm>
-            <a:off x="3566160" y="2514600"/>
-            <a:ext cx="2286000" cy="365760"/>
+              </a:rPr>
+              <a:t>Scalable to every rural school in Zimbabwe</a:t>
+            </a:r>
+            <a:endParaRPr lang="en-US" sz="2200" dirty="0"/>
+          </a:p>
+        </p:txBody>
+      </p:sp>
+      <p:sp>
+        <p:nvSpPr>
+          <p:cNvPr id="16" name="Text 14"/>
+          <p:cNvSpPr/>
+          <p:nvPr/>
+        </p:nvSpPr>
+        <p:spPr>
+          <a:xfrm>
+            <a:off x="457200" y="4663440"/>
+            <a:ext cx="11247120" cy="365760"/>
           </a:xfrm>
           <a:prstGeom prst="rect">
             <a:avLst/>
@@ -5068,482 +5247,14 @@
               <a:buNone/>
             </a:pPr>
             <a:r>
-              <a:rPr lang="en-US" sz="1300" dirty="0">
-                <a:solidFill>
-                  <a:srgbClr val="D32F2F"/>
-                </a:solidFill>
-                <a:latin typeface="Calibri" pitchFamily="34" charset="0"/>
-                <a:ea typeface="Calibri" pitchFamily="34" charset="-122"/>
-                <a:cs typeface="Calibri" pitchFamily="34" charset="-120"/>
-              </a:rPr>
-              <a:t>💰 $5-20/month</a:t>
-            </a:r>
-            <a:endParaRPr lang="en-US" sz="1300" dirty="0"/>
-          </a:p>
-        </p:txBody>
-      </p:sp>
-      <p:sp>
-        <p:nvSpPr>
-          <p:cNvPr id="14" name="Text 12"/>
-          <p:cNvSpPr/>
-          <p:nvPr/>
-        </p:nvSpPr>
-        <p:spPr>
-          <a:xfrm>
-            <a:off x="6035040" y="2514600"/>
-            <a:ext cx="2468880" cy="365760"/>
-          </a:xfrm>
-          <a:prstGeom prst="rect">
-            <a:avLst/>
-          </a:prstGeom>
-          <a:noFill/>
-          <a:ln/>
-        </p:spPr>
-        <p:txBody>
-          <a:bodyPr wrap="square" rtlCol="0" anchor="ctr"/>
-          <a:lstStyle/>
-          <a:p>
-            <a:pPr algn="ctr" indent="0" marL="0">
-              <a:buNone/>
-            </a:pPr>
-            <a:r>
-              <a:rPr lang="en-US" sz="1300" b="1" dirty="0">
-                <a:solidFill>
-                  <a:srgbClr val="2E7D32"/>
-                </a:solidFill>
-                <a:latin typeface="Calibri" pitchFamily="34" charset="0"/>
-                <a:ea typeface="Calibri" pitchFamily="34" charset="-122"/>
-                <a:cs typeface="Calibri" pitchFamily="34" charset="-120"/>
-              </a:rPr>
-              <a:t>✅ $0.00</a:t>
-            </a:r>
-            <a:endParaRPr lang="en-US" sz="1300" dirty="0"/>
-          </a:p>
-        </p:txBody>
-      </p:sp>
-      <p:sp>
-        <p:nvSpPr>
-          <p:cNvPr id="15" name="Shape 13"/>
-          <p:cNvSpPr/>
-          <p:nvPr/>
-        </p:nvSpPr>
-        <p:spPr>
-          <a:xfrm>
-            <a:off x="457200" y="3017520"/>
-            <a:ext cx="8229600" cy="457200"/>
-          </a:xfrm>
-          <a:prstGeom prst="rect">
-            <a:avLst/>
-          </a:prstGeom>
-          <a:solidFill>
-            <a:srgbClr val="F5F5F5"/>
-          </a:solidFill>
-          <a:ln w="12700">
-            <a:solidFill>
-              <a:srgbClr val="E0E0E0"/>
-            </a:solidFill>
-            <a:prstDash val="solid"/>
-          </a:ln>
-        </p:spPr>
-      </p:sp>
-      <p:sp>
-        <p:nvSpPr>
-          <p:cNvPr id="16" name="Text 14"/>
-          <p:cNvSpPr/>
-          <p:nvPr/>
-        </p:nvSpPr>
-        <p:spPr>
-          <a:xfrm>
-            <a:off x="640080" y="3063240"/>
-            <a:ext cx="2743200" cy="365760"/>
-          </a:xfrm>
-          <a:prstGeom prst="rect">
-            <a:avLst/>
-          </a:prstGeom>
-          <a:noFill/>
-          <a:ln/>
-        </p:spPr>
-        <p:txBody>
-          <a:bodyPr wrap="square" rtlCol="0" anchor="ctr"/>
-          <a:lstStyle/>
-          <a:p>
-            <a:pPr indent="0" marL="0">
-              <a:buNone/>
-            </a:pPr>
-            <a:r>
-              <a:rPr lang="en-US" sz="1400" b="1" dirty="0">
+              <a:rPr lang="en-US" sz="1800" dirty="0">
                 <a:solidFill>
                   <a:srgbClr val="1B1B1B"/>
                 </a:solidFill>
-                <a:latin typeface="Calibri" pitchFamily="34" charset="0"/>
-                <a:ea typeface="Calibri" pitchFamily="34" charset="-122"/>
-                <a:cs typeface="Calibri" pitchFamily="34" charset="-120"/>
-              </a:rPr>
-              <a:t>Setup Cost</a:t>
-            </a:r>
-            <a:endParaRPr lang="en-US" sz="1400" dirty="0"/>
-          </a:p>
-        </p:txBody>
-      </p:sp>
-      <p:sp>
-        <p:nvSpPr>
-          <p:cNvPr id="17" name="Text 15"/>
-          <p:cNvSpPr/>
-          <p:nvPr/>
-        </p:nvSpPr>
-        <p:spPr>
-          <a:xfrm>
-            <a:off x="3566160" y="3063240"/>
-            <a:ext cx="2286000" cy="365760"/>
-          </a:xfrm>
-          <a:prstGeom prst="rect">
-            <a:avLst/>
-          </a:prstGeom>
-          <a:noFill/>
-          <a:ln/>
-        </p:spPr>
-        <p:txBody>
-          <a:bodyPr wrap="square" rtlCol="0" anchor="ctr"/>
-          <a:lstStyle/>
-          <a:p>
-            <a:pPr algn="ctr" indent="0" marL="0">
-              <a:buNone/>
-            </a:pPr>
-            <a:r>
-              <a:rPr lang="en-US" sz="1300" dirty="0">
-                <a:solidFill>
-                  <a:srgbClr val="D32F2F"/>
-                </a:solidFill>
-                <a:latin typeface="Calibri" pitchFamily="34" charset="0"/>
-                <a:ea typeface="Calibri" pitchFamily="34" charset="-122"/>
-                <a:cs typeface="Calibri" pitchFamily="34" charset="-120"/>
-              </a:rPr>
-              <a:t>💸 $500-2000</a:t>
-            </a:r>
-            <a:endParaRPr lang="en-US" sz="1300" dirty="0"/>
-          </a:p>
-        </p:txBody>
-      </p:sp>
-      <p:sp>
-        <p:nvSpPr>
-          <p:cNvPr id="18" name="Text 16"/>
-          <p:cNvSpPr/>
-          <p:nvPr/>
-        </p:nvSpPr>
-        <p:spPr>
-          <a:xfrm>
-            <a:off x="6035040" y="3063240"/>
-            <a:ext cx="2468880" cy="365760"/>
-          </a:xfrm>
-          <a:prstGeom prst="rect">
-            <a:avLst/>
-          </a:prstGeom>
-          <a:noFill/>
-          <a:ln/>
-        </p:spPr>
-        <p:txBody>
-          <a:bodyPr wrap="square" rtlCol="0" anchor="ctr"/>
-          <a:lstStyle/>
-          <a:p>
-            <a:pPr algn="ctr" indent="0" marL="0">
-              <a:buNone/>
-            </a:pPr>
-            <a:r>
-              <a:rPr lang="en-US" sz="1300" b="1" dirty="0">
-                <a:solidFill>
-                  <a:srgbClr val="2E7D32"/>
-                </a:solidFill>
-                <a:latin typeface="Calibri" pitchFamily="34" charset="0"/>
-                <a:ea typeface="Calibri" pitchFamily="34" charset="-122"/>
-                <a:cs typeface="Calibri" pitchFamily="34" charset="-120"/>
-              </a:rPr>
-              <a:t>✅ $50</a:t>
-            </a:r>
-            <a:endParaRPr lang="en-US" sz="1300" dirty="0"/>
-          </a:p>
-        </p:txBody>
-      </p:sp>
-      <p:sp>
-        <p:nvSpPr>
-          <p:cNvPr id="19" name="Shape 17"/>
-          <p:cNvSpPr/>
-          <p:nvPr/>
-        </p:nvSpPr>
-        <p:spPr>
-          <a:xfrm>
-            <a:off x="457200" y="3566160"/>
-            <a:ext cx="8229600" cy="457200"/>
-          </a:xfrm>
-          <a:prstGeom prst="rect">
-            <a:avLst/>
-          </a:prstGeom>
-          <a:solidFill>
-            <a:srgbClr val="FFFFFF"/>
-          </a:solidFill>
-          <a:ln w="12700">
-            <a:solidFill>
-              <a:srgbClr val="E0E0E0"/>
-            </a:solidFill>
-            <a:prstDash val="solid"/>
-          </a:ln>
-        </p:spPr>
-      </p:sp>
-      <p:sp>
-        <p:nvSpPr>
-          <p:cNvPr id="20" name="Text 18"/>
-          <p:cNvSpPr/>
-          <p:nvPr/>
-        </p:nvSpPr>
-        <p:spPr>
-          <a:xfrm>
-            <a:off x="640080" y="3611880"/>
-            <a:ext cx="2743200" cy="365760"/>
-          </a:xfrm>
-          <a:prstGeom prst="rect">
-            <a:avLst/>
-          </a:prstGeom>
-          <a:noFill/>
-          <a:ln/>
-        </p:spPr>
-        <p:txBody>
-          <a:bodyPr wrap="square" rtlCol="0" anchor="ctr"/>
-          <a:lstStyle/>
-          <a:p>
-            <a:pPr indent="0" marL="0">
-              <a:buNone/>
-            </a:pPr>
-            <a:r>
-              <a:rPr lang="en-US" sz="1400" b="1" dirty="0">
-                <a:solidFill>
-                  <a:srgbClr val="1B1B1B"/>
-                </a:solidFill>
-                <a:latin typeface="Calibri" pitchFamily="34" charset="0"/>
-                <a:ea typeface="Calibri" pitchFamily="34" charset="-122"/>
-                <a:cs typeface="Calibri" pitchFamily="34" charset="-120"/>
-              </a:rPr>
-              <a:t>AI Tutor</a:t>
-            </a:r>
-            <a:endParaRPr lang="en-US" sz="1400" dirty="0"/>
-          </a:p>
-        </p:txBody>
-      </p:sp>
-      <p:sp>
-        <p:nvSpPr>
-          <p:cNvPr id="21" name="Text 19"/>
-          <p:cNvSpPr/>
-          <p:nvPr/>
-        </p:nvSpPr>
-        <p:spPr>
-          <a:xfrm>
-            <a:off x="3566160" y="3611880"/>
-            <a:ext cx="2286000" cy="365760"/>
-          </a:xfrm>
-          <a:prstGeom prst="rect">
-            <a:avLst/>
-          </a:prstGeom>
-          <a:noFill/>
-          <a:ln/>
-        </p:spPr>
-        <p:txBody>
-          <a:bodyPr wrap="square" rtlCol="0" anchor="ctr"/>
-          <a:lstStyle/>
-          <a:p>
-            <a:pPr algn="ctr" indent="0" marL="0">
-              <a:buNone/>
-            </a:pPr>
-            <a:r>
-              <a:rPr lang="en-US" sz="1300" dirty="0">
-                <a:solidFill>
-                  <a:srgbClr val="D32F2F"/>
-                </a:solidFill>
-                <a:latin typeface="Calibri" pitchFamily="34" charset="0"/>
-                <a:ea typeface="Calibri" pitchFamily="34" charset="-122"/>
-                <a:cs typeface="Calibri" pitchFamily="34" charset="-120"/>
-              </a:rPr>
-              <a:t>❌ Cloud-based only</a:t>
-            </a:r>
-            <a:endParaRPr lang="en-US" sz="1300" dirty="0"/>
-          </a:p>
-        </p:txBody>
-      </p:sp>
-      <p:sp>
-        <p:nvSpPr>
-          <p:cNvPr id="22" name="Text 20"/>
-          <p:cNvSpPr/>
-          <p:nvPr/>
-        </p:nvSpPr>
-        <p:spPr>
-          <a:xfrm>
-            <a:off x="6035040" y="3611880"/>
-            <a:ext cx="2468880" cy="365760"/>
-          </a:xfrm>
-          <a:prstGeom prst="rect">
-            <a:avLst/>
-          </a:prstGeom>
-          <a:noFill/>
-          <a:ln/>
-        </p:spPr>
-        <p:txBody>
-          <a:bodyPr wrap="square" rtlCol="0" anchor="ctr"/>
-          <a:lstStyle/>
-          <a:p>
-            <a:pPr algn="ctr" indent="0" marL="0">
-              <a:buNone/>
-            </a:pPr>
-            <a:r>
-              <a:rPr lang="en-US" sz="1300" b="1" dirty="0">
-                <a:solidFill>
-                  <a:srgbClr val="2E7D32"/>
-                </a:solidFill>
-                <a:latin typeface="Calibri" pitchFamily="34" charset="0"/>
-                <a:ea typeface="Calibri" pitchFamily="34" charset="-122"/>
-                <a:cs typeface="Calibri" pitchFamily="34" charset="-120"/>
-              </a:rPr>
-              <a:t>✅ Local + Shona</a:t>
-            </a:r>
-            <a:endParaRPr lang="en-US" sz="1300" dirty="0"/>
-          </a:p>
-        </p:txBody>
-      </p:sp>
-      <p:sp>
-        <p:nvSpPr>
-          <p:cNvPr id="23" name="Shape 21"/>
-          <p:cNvSpPr/>
-          <p:nvPr/>
-        </p:nvSpPr>
-        <p:spPr>
-          <a:xfrm>
-            <a:off x="457200" y="4114800"/>
-            <a:ext cx="8229600" cy="457200"/>
-          </a:xfrm>
-          <a:prstGeom prst="rect">
-            <a:avLst/>
-          </a:prstGeom>
-          <a:solidFill>
-            <a:srgbClr val="F5F5F5"/>
-          </a:solidFill>
-          <a:ln w="12700">
-            <a:solidFill>
-              <a:srgbClr val="E0E0E0"/>
-            </a:solidFill>
-            <a:prstDash val="solid"/>
-          </a:ln>
-        </p:spPr>
-      </p:sp>
-      <p:sp>
-        <p:nvSpPr>
-          <p:cNvPr id="24" name="Text 22"/>
-          <p:cNvSpPr/>
-          <p:nvPr/>
-        </p:nvSpPr>
-        <p:spPr>
-          <a:xfrm>
-            <a:off x="640080" y="4160520"/>
-            <a:ext cx="2743200" cy="365760"/>
-          </a:xfrm>
-          <a:prstGeom prst="rect">
-            <a:avLst/>
-          </a:prstGeom>
-          <a:noFill/>
-          <a:ln/>
-        </p:spPr>
-        <p:txBody>
-          <a:bodyPr wrap="square" rtlCol="0" anchor="ctr"/>
-          <a:lstStyle/>
-          <a:p>
-            <a:pPr indent="0" marL="0">
-              <a:buNone/>
-            </a:pPr>
-            <a:r>
-              <a:rPr lang="en-US" sz="1400" b="1" dirty="0">
-                <a:solidFill>
-                  <a:srgbClr val="1B1B1B"/>
-                </a:solidFill>
-                <a:latin typeface="Calibri" pitchFamily="34" charset="0"/>
-                <a:ea typeface="Calibri" pitchFamily="34" charset="-122"/>
-                <a:cs typeface="Calibri" pitchFamily="34" charset="-120"/>
-              </a:rPr>
-              <a:t>Content Sharing</a:t>
-            </a:r>
-            <a:endParaRPr lang="en-US" sz="1400" dirty="0"/>
-          </a:p>
-        </p:txBody>
-      </p:sp>
-      <p:sp>
-        <p:nvSpPr>
-          <p:cNvPr id="25" name="Text 23"/>
-          <p:cNvSpPr/>
-          <p:nvPr/>
-        </p:nvSpPr>
-        <p:spPr>
-          <a:xfrm>
-            <a:off x="3566160" y="4160520"/>
-            <a:ext cx="2286000" cy="365760"/>
-          </a:xfrm>
-          <a:prstGeom prst="rect">
-            <a:avLst/>
-          </a:prstGeom>
-          <a:noFill/>
-          <a:ln/>
-        </p:spPr>
-        <p:txBody>
-          <a:bodyPr wrap="square" rtlCol="0" anchor="ctr"/>
-          <a:lstStyle/>
-          <a:p>
-            <a:pPr algn="ctr" indent="0" marL="0">
-              <a:buNone/>
-            </a:pPr>
-            <a:r>
-              <a:rPr lang="en-US" sz="1300" dirty="0">
-                <a:solidFill>
-                  <a:srgbClr val="D32F2F"/>
-                </a:solidFill>
-                <a:latin typeface="Calibri" pitchFamily="34" charset="0"/>
-                <a:ea typeface="Calibri" pitchFamily="34" charset="-122"/>
-                <a:cs typeface="Calibri" pitchFamily="34" charset="-120"/>
-              </a:rPr>
-              <a:t>❌ Centralized</a:t>
-            </a:r>
-            <a:endParaRPr lang="en-US" sz="1300" dirty="0"/>
-          </a:p>
-        </p:txBody>
-      </p:sp>
-      <p:sp>
-        <p:nvSpPr>
-          <p:cNvPr id="26" name="Text 24"/>
-          <p:cNvSpPr/>
-          <p:nvPr/>
-        </p:nvSpPr>
-        <p:spPr>
-          <a:xfrm>
-            <a:off x="6035040" y="4160520"/>
-            <a:ext cx="2468880" cy="365760"/>
-          </a:xfrm>
-          <a:prstGeom prst="rect">
-            <a:avLst/>
-          </a:prstGeom>
-          <a:noFill/>
-          <a:ln/>
-        </p:spPr>
-        <p:txBody>
-          <a:bodyPr wrap="square" rtlCol="0" anchor="ctr"/>
-          <a:lstStyle/>
-          <a:p>
-            <a:pPr algn="ctr" indent="0" marL="0">
-              <a:buNone/>
-            </a:pPr>
-            <a:r>
-              <a:rPr lang="en-US" sz="1300" b="1" dirty="0">
-                <a:solidFill>
-                  <a:srgbClr val="2E7D32"/>
-                </a:solidFill>
-                <a:latin typeface="Calibri" pitchFamily="34" charset="0"/>
-                <a:ea typeface="Calibri" pitchFamily="34" charset="-122"/>
-                <a:cs typeface="Calibri" pitchFamily="34" charset="-120"/>
-              </a:rPr>
-              <a:t>✅ P2P + Rewards</a:t>
-            </a:r>
-            <a:endParaRPr lang="en-US" sz="1300" dirty="0"/>
+              </a:rPr>
+              <a:t>Closes the 43-point pass-rate gap between rural and urban students</a:t>
+            </a:r>
+            <a:endParaRPr lang="en-US" sz="1800" dirty="0"/>
           </a:p>
         </p:txBody>
       </p:sp>
@@ -5587,7 +5298,7 @@
         </p:nvSpPr>
         <p:spPr>
           <a:xfrm rot="2700000">
-            <a:off x="6858000" y="-457200"/>
+            <a:off x="9601200" y="-457200"/>
             <a:ext cx="2743200" cy="2743200"/>
           </a:xfrm>
           <a:prstGeom prst="rect">
@@ -5609,7 +5320,7 @@
         </p:nvSpPr>
         <p:spPr>
           <a:xfrm rot="1800000">
-            <a:off x="-914400" y="3657600"/>
+            <a:off x="-914400" y="5029200"/>
             <a:ext cx="2286000" cy="2286000"/>
           </a:xfrm>
           <a:prstGeom prst="rect">
@@ -5631,8 +5342,8 @@
         </p:nvSpPr>
         <p:spPr>
           <a:xfrm>
-            <a:off x="457200" y="1097280"/>
-            <a:ext cx="8229600" cy="731520"/>
+            <a:off x="457200" y="822960"/>
+            <a:ext cx="11247120" cy="822960"/>
           </a:xfrm>
           <a:prstGeom prst="rect">
             <a:avLst/>
@@ -5648,7 +5359,7 @@
               <a:buNone/>
             </a:pPr>
             <a:r>
-              <a:rPr lang="en-US" sz="5200" b="1" dirty="0">
+              <a:rPr lang="en-US" sz="5000" b="1" dirty="0">
                 <a:solidFill>
                   <a:srgbClr val="FFFFFF"/>
                 </a:solidFill>
@@ -5658,7 +5369,7 @@
               </a:rPr>
               <a:t>NEXT STEPS</a:t>
             </a:r>
-            <a:endParaRPr lang="en-US" sz="5200" dirty="0"/>
+            <a:endParaRPr lang="en-US" sz="5000" dirty="0"/>
           </a:p>
         </p:txBody>
       </p:sp>
@@ -5670,8 +5381,8 @@
         </p:nvSpPr>
         <p:spPr>
           <a:xfrm>
-            <a:off x="1371600" y="2286000"/>
-            <a:ext cx="6400800" cy="502920"/>
+            <a:off x="1645920" y="1920240"/>
+            <a:ext cx="8869680" cy="548640"/>
           </a:xfrm>
           <a:prstGeom prst="rect">
             <a:avLst/>
@@ -5697,8 +5408,8 @@
         </p:nvSpPr>
         <p:spPr>
           <a:xfrm>
-            <a:off x="1554480" y="2350008"/>
-            <a:ext cx="6035040" cy="365760"/>
+            <a:off x="1828800" y="1993392"/>
+            <a:ext cx="8503920" cy="411480"/>
           </a:xfrm>
           <a:prstGeom prst="rect">
             <a:avLst/>
@@ -5718,11 +5429,8 @@
                 <a:solidFill>
                   <a:srgbClr val="FFFFFF"/>
                 </a:solidFill>
-                <a:latin typeface="Calibri" pitchFamily="34" charset="0"/>
-                <a:ea typeface="Calibri" pitchFamily="34" charset="-122"/>
-                <a:cs typeface="Calibri" pitchFamily="34" charset="-120"/>
-              </a:rPr>
-              <a:t>🚀 Pilot in 5 rural schools (Madziva, Rusape, Gokwe, Kariba, Binga)</a:t>
+              </a:rPr>
+              <a:t>Pilot in 5 rural schools (Madziva, Rusape, Gokwe, Kariba, Binga)</a:t>
             </a:r>
             <a:endParaRPr lang="en-US" sz="1500" dirty="0"/>
           </a:p>
@@ -5736,8 +5444,8 @@
         </p:nvSpPr>
         <p:spPr>
           <a:xfrm>
-            <a:off x="1371600" y="2880360"/>
-            <a:ext cx="6400800" cy="502920"/>
+            <a:off x="1645920" y="2606040"/>
+            <a:ext cx="8869680" cy="548640"/>
           </a:xfrm>
           <a:prstGeom prst="rect">
             <a:avLst/>
@@ -5763,8 +5471,8 @@
         </p:nvSpPr>
         <p:spPr>
           <a:xfrm>
-            <a:off x="1554480" y="2944368"/>
-            <a:ext cx="6035040" cy="365760"/>
+            <a:off x="1828800" y="2679192"/>
+            <a:ext cx="8503920" cy="411480"/>
           </a:xfrm>
           <a:prstGeom prst="rect">
             <a:avLst/>
@@ -5784,11 +5492,8 @@
                 <a:solidFill>
                   <a:srgbClr val="FFFFFF"/>
                 </a:solidFill>
-                <a:latin typeface="Calibri" pitchFamily="34" charset="0"/>
-                <a:ea typeface="Calibri" pitchFamily="34" charset="-122"/>
-                <a:cs typeface="Calibri" pitchFamily="34" charset="-120"/>
-              </a:rPr>
-              <a:t>📊 Measure ZIMSEC pass rate improvement over 6 months</a:t>
+              </a:rPr>
+              <a:t>Measure ZIMSEC pass-rate improvement over one term</a:t>
             </a:r>
             <a:endParaRPr lang="en-US" sz="1500" dirty="0"/>
           </a:p>
@@ -5802,8 +5507,8 @@
         </p:nvSpPr>
         <p:spPr>
           <a:xfrm>
-            <a:off x="1371600" y="3474720"/>
-            <a:ext cx="6400800" cy="502920"/>
+            <a:off x="1645920" y="3291840"/>
+            <a:ext cx="8869680" cy="548640"/>
           </a:xfrm>
           <a:prstGeom prst="rect">
             <a:avLst/>
@@ -5829,8 +5534,8 @@
         </p:nvSpPr>
         <p:spPr>
           <a:xfrm>
-            <a:off x="1554480" y="3538728"/>
-            <a:ext cx="6035040" cy="365760"/>
+            <a:off x="1828800" y="3364992"/>
+            <a:ext cx="8503920" cy="411480"/>
           </a:xfrm>
           <a:prstGeom prst="rect">
             <a:avLst/>
@@ -5850,11 +5555,8 @@
                 <a:solidFill>
                   <a:srgbClr val="FFFFFF"/>
                 </a:solidFill>
-                <a:latin typeface="Calibri" pitchFamily="34" charset="0"/>
-                <a:ea typeface="Calibri" pitchFamily="34" charset="-122"/>
-                <a:cs typeface="Calibri" pitchFamily="34" charset="-120"/>
-              </a:rPr>
-              <a:t>🤝 Partner with Ministry of Education for nationwide rollout</a:t>
+              </a:rPr>
+              <a:t>Partner with the Ministry of Education for nationwide rollout</a:t>
             </a:r>
             <a:endParaRPr lang="en-US" sz="1500" dirty="0"/>
           </a:p>
@@ -5868,8 +5570,8 @@
         </p:nvSpPr>
         <p:spPr>
           <a:xfrm>
-            <a:off x="1371600" y="4069080"/>
-            <a:ext cx="6400800" cy="502920"/>
+            <a:off x="1645920" y="3977640"/>
+            <a:ext cx="8869680" cy="548640"/>
           </a:xfrm>
           <a:prstGeom prst="rect">
             <a:avLst/>
@@ -5895,8 +5597,8 @@
         </p:nvSpPr>
         <p:spPr>
           <a:xfrm>
-            <a:off x="1554480" y="4133088"/>
-            <a:ext cx="6035040" cy="365760"/>
+            <a:off x="1828800" y="4050792"/>
+            <a:ext cx="8503920" cy="411480"/>
           </a:xfrm>
           <a:prstGeom prst="rect">
             <a:avLst/>
@@ -5916,11 +5618,8 @@
                 <a:solidFill>
                   <a:srgbClr val="FFFFFF"/>
                 </a:solidFill>
-                <a:latin typeface="Calibri" pitchFamily="34" charset="0"/>
-                <a:ea typeface="Calibri" pitchFamily="34" charset="-122"/>
-                <a:cs typeface="Calibri" pitchFamily="34" charset="-120"/>
-              </a:rPr>
-              <a:t>💡 Open-source the platform for other African countries</a:t>
+              </a:rPr>
+              <a:t>Open-source the platform for other African countries</a:t>
             </a:r>
             <a:endParaRPr lang="en-US" sz="1500" dirty="0"/>
           </a:p>
@@ -5934,8 +5633,8 @@
         </p:nvSpPr>
         <p:spPr>
           <a:xfrm>
-            <a:off x="457200" y="4754880"/>
-            <a:ext cx="8229600" cy="365760"/>
+            <a:off x="457200" y="4846320"/>
+            <a:ext cx="11247120" cy="457200"/>
           </a:xfrm>
           <a:prstGeom prst="rect">
             <a:avLst/>
@@ -5955,11 +5654,8 @@
                 <a:solidFill>
                   <a:srgbClr val="FDD835"/>
                 </a:solidFill>
-                <a:latin typeface="Trebuchet MS" pitchFamily="34" charset="0"/>
-                <a:ea typeface="Trebuchet MS" pitchFamily="34" charset="-122"/>
-                <a:cs typeface="Trebuchet MS" pitchFamily="34" charset="-120"/>
-              </a:rPr>
-              <a:t>Let's end Digital Apartheid in Zimbabwe</a:t>
+              </a:rPr>
+              <a:t>"Let's end Digital Apartheid in Zimbabwe"</a:t>
             </a:r>
             <a:endParaRPr lang="en-US" sz="2400" dirty="0"/>
           </a:p>
@@ -5973,8 +5669,8 @@
         </p:nvSpPr>
         <p:spPr>
           <a:xfrm>
-            <a:off x="457200" y="5212080"/>
-            <a:ext cx="8229600" cy="274320"/>
+            <a:off x="457200" y="5440680"/>
+            <a:ext cx="11247120" cy="320040"/>
           </a:xfrm>
           <a:prstGeom prst="rect">
             <a:avLst/>
@@ -5990,17 +5686,50 @@
               <a:buNone/>
             </a:pPr>
             <a:r>
-              <a:rPr lang="en-US" sz="1800" dirty="0">
+              <a:rPr lang="en-US" sz="1400" dirty="0">
                 <a:solidFill>
                   <a:srgbClr val="F5F5F5"/>
                 </a:solidFill>
-                <a:latin typeface="Calibri" pitchFamily="34" charset="0"/>
-                <a:ea typeface="Calibri" pitchFamily="34" charset="-122"/>
-                <a:cs typeface="Calibri" pitchFamily="34" charset="-120"/>
+              </a:rPr>
+              <a:t>Brighton &amp; Kudakwashe Calvin Bhamusi  |  github.com/BR-Codeio/edu-sync-mesh</a:t>
+            </a:r>
+            <a:endParaRPr lang="en-US" sz="1400" dirty="0"/>
+          </a:p>
+        </p:txBody>
+      </p:sp>
+      <p:sp>
+        <p:nvSpPr>
+          <p:cNvPr id="15" name="Text 13"/>
+          <p:cNvSpPr/>
+          <p:nvPr/>
+        </p:nvSpPr>
+        <p:spPr>
+          <a:xfrm>
+            <a:off x="457200" y="5943600"/>
+            <a:ext cx="11247120" cy="320040"/>
+          </a:xfrm>
+          <a:prstGeom prst="rect">
+            <a:avLst/>
+          </a:prstGeom>
+          <a:noFill/>
+          <a:ln/>
+        </p:spPr>
+        <p:txBody>
+          <a:bodyPr wrap="square" rtlCol="0" anchor="ctr"/>
+          <a:lstStyle/>
+          <a:p>
+            <a:pPr algn="ctr" indent="0" marL="0">
+              <a:buNone/>
+            </a:pPr>
+            <a:r>
+              <a:rPr lang="en-US" sz="1600" dirty="0">
+                <a:solidFill>
+                  <a:srgbClr val="F5F5F5"/>
+                </a:solidFill>
               </a:rPr>
               <a:t>Questions?</a:t>
             </a:r>
-            <a:endParaRPr lang="en-US" sz="1800" dirty="0"/>
+            <a:endParaRPr lang="en-US" sz="1600" dirty="0"/>
           </a:p>
         </p:txBody>
       </p:sp>
